--- a/submission/DTMS_Paper_Presentation_Short.pptx
+++ b/submission/DTMS_Paper_Presentation_Short.pptx
@@ -5,7 +5,7 @@
     <p:sldMasterId id="2147483648" r:id="rId1"/>
   </p:sldMasterIdLst>
   <p:notesMasterIdLst>
-    <p:notesMasterId r:id="rId25"/>
+    <p:notesMasterId r:id="rId15"/>
   </p:notesMasterIdLst>
   <p:sldIdLst>
     <p:sldId id="256" r:id="rId2"/>
@@ -14,12 +14,13 @@
     <p:sldId id="259" r:id="rId5"/>
     <p:sldId id="260" r:id="rId6"/>
     <p:sldId id="261" r:id="rId7"/>
-    <p:sldId id="262" r:id="rId13"/>
-    <p:sldId id="263" r:id="rId14"/>
-    <p:sldId id="264" r:id="rId15"/>
-    <p:sldId id="265" r:id="rId16"/>
-    <p:sldId id="266" r:id="rId17"/>
-    <p:sldId id="267" r:id="rId18"/>
+    <p:sldId id="268" r:id="rId8"/>
+    <p:sldId id="262" r:id="rId9"/>
+    <p:sldId id="263" r:id="rId10"/>
+    <p:sldId id="264" r:id="rId11"/>
+    <p:sldId id="265" r:id="rId12"/>
+    <p:sldId id="266" r:id="rId13"/>
+    <p:sldId id="267" r:id="rId14"/>
   </p:sldIdLst>
   <p:sldSz cx="12192000" cy="6858000"/>
   <p:notesSz cx="6858000" cy="9144000"/>
@@ -333,7 +334,7 @@
 </file>
 
 <file path=ppt/notesSlides/notesSlide10.xml><?xml version="1.0" encoding="utf-8"?>
-<p:notes xmlns:a="http://schemas.openxmlformats.org/drawingml/2006/main" xmlns:p="http://schemas.openxmlformats.org/presentationml/2006/main" xmlns:r="http://schemas.openxmlformats.org/officeDocument/2006/relationships">
+<p:notes xmlns:a="http://schemas.openxmlformats.org/drawingml/2006/main" xmlns:r="http://schemas.openxmlformats.org/officeDocument/2006/relationships" xmlns:p="http://schemas.openxmlformats.org/presentationml/2006/main">
   <p:cSld>
     <p:spTree>
       <p:nvGrpSpPr>
@@ -365,7 +366,7 @@
           <a:lstStyle/>
           <a:p>
             <a:r>
-              <a:t>Measuring both engines across all seven table sizes shows they do not just differ by degree, they fail in opposite ways. As tables grow, PostgreSQL gets wrong more often but its worst case stays small, never past 3.7 times. MariaDB gets wrong less often but its worst case climbs to 31 times. The practical point is the one on the right: a database that is wrong often but never badly is easier to live with than one wrong rarely but catastrophically. If you summarise either engine with a single number you lose exactly this.</a:t>
+              <a:t>The largest single effect we measured, and the clearest example of the problem. Adding a BRIN index next to an existing B-tree on the same column, which people do because BRIN indexes are tiny and look free. The rate of bad choices goes from two percent to seventy three. On a controlled test where the only thing I changed was whether that index existed, one query went from a third of a millisecond to sixty six. The reason is one line in the PostgreSQL source: when two indexes can answer the same query it keeps whichever is cheaper to read, ignoring the work the query then does on the table. BRIN is tiny, so it always wins, and the index thrown away is the fast one.</a:t>
             </a:r>
           </a:p>
         </p:txBody>
@@ -379,7 +380,7 @@
 </file>
 
 <file path=ppt/notesSlides/notesSlide11.xml><?xml version="1.0" encoding="utf-8"?>
-<p:notes xmlns:a="http://schemas.openxmlformats.org/drawingml/2006/main" xmlns:p="http://schemas.openxmlformats.org/presentationml/2006/main" xmlns:r="http://schemas.openxmlformats.org/officeDocument/2006/relationships">
+<p:notes xmlns:a="http://schemas.openxmlformats.org/drawingml/2006/main" xmlns:r="http://schemas.openxmlformats.org/officeDocument/2006/relationships" xmlns:p="http://schemas.openxmlformats.org/presentationml/2006/main">
   <p:cSld>
     <p:spTree>
       <p:nvGrpSpPr>
@@ -411,7 +412,7 @@
           <a:lstStyle/>
           <a:p>
             <a:r>
-              <a:t>Pulling it together. We tested four pieces of advice that appear in official documentation and well-regarded blogs. Every one of them is sensible. Every one of them, under conditions we can now name, makes things worse. And look at the middle column: in three of the four the advice does exactly what it promises. Extended statistics really do fix the estimate, by a factor of 108. The query still gets slower. That is the pattern of the whole study: the advice improves a proxy, and the proxy is not what determines the outcome.</a:t>
+              <a:t>Measuring both engines across all seven table sizes shows they do not just differ by degree, they fail in opposite ways. As tables grow, PostgreSQL gets wrong more often but its worst case stays small, never past 3.7 times. MariaDB gets wrong less often but its worst case climbs to 31 times. The practical point is the one on the right: a database that is wrong often but never badly is easier to live with than one wrong rarely but catastrophically. If you summarise either engine with a single number you lose exactly this.</a:t>
             </a:r>
           </a:p>
         </p:txBody>
@@ -425,7 +426,53 @@
 </file>
 
 <file path=ppt/notesSlides/notesSlide12.xml><?xml version="1.0" encoding="utf-8"?>
-<p:notes xmlns:a="http://schemas.openxmlformats.org/drawingml/2006/main" xmlns:p="http://schemas.openxmlformats.org/presentationml/2006/main" xmlns:r="http://schemas.openxmlformats.org/officeDocument/2006/relationships">
+<p:notes xmlns:a="http://schemas.openxmlformats.org/drawingml/2006/main" xmlns:r="http://schemas.openxmlformats.org/officeDocument/2006/relationships" xmlns:p="http://schemas.openxmlformats.org/presentationml/2006/main">
+  <p:cSld>
+    <p:spTree>
+      <p:nvGrpSpPr>
+        <p:cNvPr id="1" name=""/>
+        <p:cNvGrpSpPr/>
+        <p:nvPr/>
+      </p:nvGrpSpPr>
+      <p:grpSpPr>
+        <a:xfrm>
+          <a:off x="0" y="0"/>
+          <a:ext cx="0" cy="0"/>
+          <a:chOff x="0" y="0"/>
+          <a:chExt cx="0" cy="0"/>
+        </a:xfrm>
+      </p:grpSpPr>
+      <p:sp>
+        <p:nvSpPr>
+          <p:cNvPr id="3" name="Notes Placeholder 2"/>
+          <p:cNvSpPr>
+            <a:spLocks noGrp="1"/>
+          </p:cNvSpPr>
+          <p:nvPr>
+            <p:ph type="body" sz="quarter" idx="3"/>
+          </p:nvPr>
+        </p:nvSpPr>
+        <p:spPr/>
+        <p:txBody>
+          <a:bodyPr/>
+          <a:lstStyle/>
+          <a:p>
+            <a:r>
+              <a:t>Pulling it together. We tested four pieces of advice that appear in official documentation and well-regarded blogs. Every one of them is sensible. Every one of them, under conditions we can now name, makes things worse. And look at the middle column: in three of the four the advice does exactly what it promises. Extended statistics really do fix the estimate, by a factor of 108. The query still gets slower. That is the pattern of the whole study: the advice improves a proxy, and the proxy is not what determines the outcome.</a:t>
+            </a:r>
+          </a:p>
+        </p:txBody>
+      </p:sp>
+    </p:spTree>
+  </p:cSld>
+  <p:clrMapOvr>
+    <a:masterClrMapping/>
+  </p:clrMapOvr>
+</p:notes>
+</file>
+
+<file path=ppt/notesSlides/notesSlide13.xml><?xml version="1.0" encoding="utf-8"?>
+<p:notes xmlns:a="http://schemas.openxmlformats.org/drawingml/2006/main" xmlns:r="http://schemas.openxmlformats.org/officeDocument/2006/relationships" xmlns:p="http://schemas.openxmlformats.org/presentationml/2006/main">
   <p:cSld>
     <p:spTree>
       <p:nvGrpSpPr>
@@ -831,7 +878,7 @@
 </file>
 
 <file path=ppt/notesSlides/notesSlide7.xml><?xml version="1.0" encoding="utf-8"?>
-<p:notes xmlns:a="http://schemas.openxmlformats.org/drawingml/2006/main" xmlns:p="http://schemas.openxmlformats.org/presentationml/2006/main" xmlns:r="http://schemas.openxmlformats.org/officeDocument/2006/relationships">
+<p:notes xmlns:a="http://schemas.openxmlformats.org/drawingml/2006/main" xmlns:r="http://schemas.openxmlformats.org/officeDocument/2006/relationships" xmlns:p="http://schemas.openxmlformats.org/presentationml/2006/main">
   <p:cSld>
     <p:spTree>
       <p:nvGrpSpPr>
@@ -849,6 +896,18 @@
       </p:grpSpPr>
       <p:sp>
         <p:nvSpPr>
+          <p:cNvPr id="2" name="Slide Image Placeholder 1"/>
+          <p:cNvSpPr>
+            <a:spLocks noGrp="1" noRot="1" noChangeAspect="1"/>
+          </p:cNvSpPr>
+          <p:nvPr>
+            <p:ph type="sldImg" idx="2"/>
+          </p:nvPr>
+        </p:nvSpPr>
+        <p:spPr/>
+      </p:sp>
+      <p:sp>
+        <p:nvSpPr>
           <p:cNvPr id="3" name="Notes Placeholder 2"/>
           <p:cNvSpPr>
             <a:spLocks noGrp="1"/>
@@ -863,10 +922,23 @@
           <a:lstStyle/>
           <a:p>
             <a:r>
-              <a:t>So why is MariaDB wrong so much more often? It is not that it costs plans less carefully. It is that it has fewer plans to choose from. This counts what each engine actually picked when handed every index. PostgreSQL answers almost everything with a bitmap scan, which sorts the matching row locations into disk order before fetching them. MariaDB never forms one. It either does a direct index lookup or gives up and scans the whole table, sixty six times, where PostgreSQL did it nine times. That single difference explains the gap.</a:t>
-            </a:r>
-          </a:p>
-        </p:txBody>
+              <a:rPr dirty="0"/>
+              <a:t>Breaking that down by query family shows the difference is not uniform. PostgreSQL's only real weakness is the conjunctive family, ten percent, and note its estimation error there is 71, by far the worst number in its column. MariaDB is the mirror image. Its estimates on conjunctions are perfect, exactly 1.00, yet it still chooses badly 45 percent of the time. And look at equality: three queries, wrong on all three, median regret 6.8. Perfect knowledge, wrong decision.</a:t>
+            </a:r>
+          </a:p>
+        </p:txBody>
+      </p:sp>
+      <p:sp>
+        <p:nvSpPr>
+          <p:cNvPr id="4" name="Slide Number Placeholder 3"/>
+          <p:cNvSpPr>
+            <a:spLocks noGrp="1"/>
+          </p:cNvSpPr>
+          <p:nvPr>
+            <p:ph type="sldNum" sz="quarter" idx="5"/>
+          </p:nvPr>
+        </p:nvSpPr>
+        <p:spPr/>
       </p:sp>
     </p:spTree>
   </p:cSld>
@@ -877,7 +949,7 @@
 </file>
 
 <file path=ppt/notesSlides/notesSlide8.xml><?xml version="1.0" encoding="utf-8"?>
-<p:notes xmlns:a="http://schemas.openxmlformats.org/drawingml/2006/main" xmlns:p="http://schemas.openxmlformats.org/presentationml/2006/main" xmlns:r="http://schemas.openxmlformats.org/officeDocument/2006/relationships">
+<p:notes xmlns:a="http://schemas.openxmlformats.org/drawingml/2006/main" xmlns:r="http://schemas.openxmlformats.org/officeDocument/2006/relationships" xmlns:p="http://schemas.openxmlformats.org/presentationml/2006/main">
   <p:cSld>
     <p:spTree>
       <p:nvGrpSpPr>
@@ -909,7 +981,8 @@
           <a:lstStyle/>
           <a:p>
             <a:r>
-              <a:t>This is the single most important thing we found. The textbook says bad plans come from the database misjudging how many rows will come back. So I checked every case where it chose a slower path and measured the estimate. In 98 percent of them the estimate was essentially correct. The database knew the right numbers and still chose the slower plan. That means the fault is in the cost model, not the statistics, and it means the tuning advice that tries to improve statistics is aimed at the wrong thing.</a:t>
+              <a:rPr dirty="0"/>
+              <a:t>So why is MariaDB wrong so much more often? It is not that it costs plans less carefully. It is that it has fewer plans to choose from. This counts what each engine actually picked when handed every index. PostgreSQL answers almost everything with a bitmap scan, which sorts the matching row locations into disk order before fetching them. MariaDB never forms one. It either does a direct index lookup or gives up and scans the whole table, sixty six times, where PostgreSQL did it nine times. That single difference explains the gap.</a:t>
             </a:r>
           </a:p>
         </p:txBody>
@@ -923,7 +996,7 @@
 </file>
 
 <file path=ppt/notesSlides/notesSlide9.xml><?xml version="1.0" encoding="utf-8"?>
-<p:notes xmlns:a="http://schemas.openxmlformats.org/drawingml/2006/main" xmlns:p="http://schemas.openxmlformats.org/presentationml/2006/main" xmlns:r="http://schemas.openxmlformats.org/officeDocument/2006/relationships">
+<p:notes xmlns:a="http://schemas.openxmlformats.org/drawingml/2006/main" xmlns:r="http://schemas.openxmlformats.org/officeDocument/2006/relationships" xmlns:p="http://schemas.openxmlformats.org/presentationml/2006/main">
   <p:cSld>
     <p:spTree>
       <p:nvGrpSpPr>
@@ -955,7 +1028,7 @@
           <a:lstStyle/>
           <a:p>
             <a:r>
-              <a:t>The largest single effect we measured, and the clearest example of the problem. Adding a BRIN index next to an existing B-tree on the same column, which people do because BRIN indexes are tiny and look free. The rate of bad choices goes from two percent to seventy three. On a controlled test where the only thing I changed was whether that index existed, one query went from a third of a millisecond to sixty six. The reason is one line in the PostgreSQL source: when two indexes can answer the same query it keeps whichever is cheaper to read, ignoring the work the query then does on the table. BRIN is tiny, so it always wins, and the index thrown away is the fast one.</a:t>
+              <a:t>This is the single most important thing we found. The textbook says bad plans come from the database misjudging how many rows will come back. So I checked every case where it chose a slower path and measured the estimate. In 98 percent of them the estimate was essentially correct. The database knew the right numbers and still chose the slower plan. That means the fault is in the cost model, not the statistics, and it means the tuning advice that tries to improve statistics is aimed at the wrong thing.</a:t>
             </a:r>
           </a:p>
         </p:txBody>
@@ -4230,7 +4303,440 @@
 </file>
 
 <file path=ppt/slides/slide10.xml><?xml version="1.0" encoding="utf-8"?>
-<p:sld xmlns:a="http://schemas.openxmlformats.org/drawingml/2006/main" xmlns:p="http://schemas.openxmlformats.org/presentationml/2006/main" xmlns:r="http://schemas.openxmlformats.org/officeDocument/2006/relationships">
+<p:sld xmlns:a="http://schemas.openxmlformats.org/drawingml/2006/main" xmlns:r="http://schemas.openxmlformats.org/officeDocument/2006/relationships" xmlns:p="http://schemas.openxmlformats.org/presentationml/2006/main">
+  <p:cSld>
+    <p:bg>
+      <p:bgPr>
+        <a:solidFill>
+          <a:srgbClr val="14171A"/>
+        </a:solidFill>
+        <a:effectLst/>
+      </p:bgPr>
+    </p:bg>
+    <p:spTree>
+      <p:nvGrpSpPr>
+        <p:cNvPr id="1" name=""/>
+        <p:cNvGrpSpPr/>
+        <p:nvPr/>
+      </p:nvGrpSpPr>
+      <p:grpSpPr>
+        <a:xfrm>
+          <a:off x="0" y="0"/>
+          <a:ext cx="0" cy="0"/>
+          <a:chOff x="0" y="0"/>
+          <a:chExt cx="0" cy="0"/>
+        </a:xfrm>
+      </p:grpSpPr>
+      <p:sp>
+        <p:nvSpPr>
+          <p:cNvPr id="2" name="TextBox 1"/>
+          <p:cNvSpPr txBox="1"/>
+          <p:nvPr/>
+        </p:nvSpPr>
+        <p:spPr>
+          <a:xfrm>
+            <a:off x="822960" y="566928"/>
+            <a:ext cx="10546080" cy="274320"/>
+          </a:xfrm>
+          <a:prstGeom prst="rect">
+            <a:avLst/>
+          </a:prstGeom>
+          <a:noFill/>
+        </p:spPr>
+        <p:txBody>
+          <a:bodyPr wrap="square" lIns="0" tIns="0" rIns="0" bIns="0" anchor="t">
+            <a:spAutoFit/>
+          </a:bodyPr>
+          <a:lstStyle/>
+          <a:p>
+            <a:pPr algn="l">
+              <a:lnSpc>
+                <a:spcPct val="100000"/>
+              </a:lnSpc>
+            </a:pPr>
+            <a:r>
+              <a:rPr sz="1050" b="1">
+                <a:solidFill>
+                  <a:srgbClr val="92989E"/>
+                </a:solidFill>
+                <a:latin typeface="Segoe UI"/>
+              </a:rPr>
+              <a:t>THE BIGGEST EFFECT WE MEASURED</a:t>
+            </a:r>
+          </a:p>
+        </p:txBody>
+      </p:sp>
+      <p:sp>
+        <p:nvSpPr>
+          <p:cNvPr id="3" name="TextBox 2"/>
+          <p:cNvSpPr txBox="1"/>
+          <p:nvPr/>
+        </p:nvSpPr>
+        <p:spPr>
+          <a:xfrm>
+            <a:off x="822960" y="914400"/>
+            <a:ext cx="10546080" cy="1005840"/>
+          </a:xfrm>
+          <a:prstGeom prst="rect">
+            <a:avLst/>
+          </a:prstGeom>
+          <a:noFill/>
+        </p:spPr>
+        <p:txBody>
+          <a:bodyPr wrap="square" lIns="0" tIns="0" rIns="0" bIns="0" anchor="t">
+            <a:spAutoFit/>
+          </a:bodyPr>
+          <a:lstStyle/>
+          <a:p>
+            <a:pPr algn="l">
+              <a:lnSpc>
+                <a:spcPct val="112000"/>
+              </a:lnSpc>
+            </a:pPr>
+            <a:r>
+              <a:rPr sz="3000" b="0">
+                <a:solidFill>
+                  <a:srgbClr val="F2EFEA"/>
+                </a:solidFill>
+                <a:latin typeface="Georgia"/>
+              </a:rPr>
+              <a:t>Adding an index made the query slower</a:t>
+            </a:r>
+          </a:p>
+        </p:txBody>
+      </p:sp>
+      <p:sp>
+        <p:nvSpPr>
+          <p:cNvPr id="4" name="TextBox 3"/>
+          <p:cNvSpPr txBox="1"/>
+          <p:nvPr/>
+        </p:nvSpPr>
+        <p:spPr>
+          <a:xfrm>
+            <a:off x="822960" y="2194560"/>
+            <a:ext cx="5669280" cy="1280160"/>
+          </a:xfrm>
+          <a:prstGeom prst="rect">
+            <a:avLst/>
+          </a:prstGeom>
+          <a:noFill/>
+        </p:spPr>
+        <p:txBody>
+          <a:bodyPr wrap="square" lIns="0" tIns="0" rIns="0" bIns="0" anchor="t">
+            <a:spAutoFit/>
+          </a:bodyPr>
+          <a:lstStyle/>
+          <a:p>
+            <a:pPr algn="l">
+              <a:lnSpc>
+                <a:spcPct val="95000"/>
+              </a:lnSpc>
+            </a:pPr>
+            <a:r>
+              <a:rPr sz="9400" b="0">
+                <a:solidFill>
+                  <a:srgbClr val="E27660"/>
+                </a:solidFill>
+                <a:latin typeface="Georgia"/>
+              </a:rPr>
+              <a:t>194x</a:t>
+            </a:r>
+          </a:p>
+        </p:txBody>
+      </p:sp>
+      <p:sp>
+        <p:nvSpPr>
+          <p:cNvPr id="5" name="TextBox 4"/>
+          <p:cNvSpPr txBox="1"/>
+          <p:nvPr/>
+        </p:nvSpPr>
+        <p:spPr>
+          <a:xfrm>
+            <a:off x="822960" y="3531108"/>
+            <a:ext cx="5669280" cy="822960"/>
+          </a:xfrm>
+          <a:prstGeom prst="rect">
+            <a:avLst/>
+          </a:prstGeom>
+          <a:noFill/>
+        </p:spPr>
+        <p:txBody>
+          <a:bodyPr wrap="square" lIns="0" tIns="0" rIns="0" bIns="0" anchor="t">
+            <a:spAutoFit/>
+          </a:bodyPr>
+          <a:lstStyle/>
+          <a:p>
+            <a:pPr algn="l">
+              <a:lnSpc>
+                <a:spcPct val="125000"/>
+              </a:lnSpc>
+            </a:pPr>
+            <a:r>
+              <a:rPr sz="1300" b="0" dirty="0">
+                <a:solidFill>
+                  <a:srgbClr val="92989E"/>
+                </a:solidFill>
+                <a:latin typeface="Segoe UI"/>
+              </a:rPr>
+              <a:t>slower, and the only thing that changed was that
+a BRIN index existed next to the B-tree</a:t>
+            </a:r>
+          </a:p>
+        </p:txBody>
+      </p:sp>
+      <p:sp>
+        <p:nvSpPr>
+          <p:cNvPr id="6" name="TextBox 5"/>
+          <p:cNvSpPr txBox="1"/>
+          <p:nvPr/>
+        </p:nvSpPr>
+        <p:spPr>
+          <a:xfrm>
+            <a:off x="822960" y="4709160"/>
+            <a:ext cx="5669280" cy="548640"/>
+          </a:xfrm>
+          <a:prstGeom prst="rect">
+            <a:avLst/>
+          </a:prstGeom>
+          <a:noFill/>
+        </p:spPr>
+        <p:txBody>
+          <a:bodyPr wrap="square" lIns="0" tIns="0" rIns="0" bIns="0" anchor="t">
+            <a:spAutoFit/>
+          </a:bodyPr>
+          <a:lstStyle/>
+          <a:p>
+            <a:pPr algn="l">
+              <a:lnSpc>
+                <a:spcPct val="120000"/>
+              </a:lnSpc>
+            </a:pPr>
+            <a:r>
+              <a:rPr sz="2200" b="0">
+                <a:solidFill>
+                  <a:srgbClr val="F2EFEA"/>
+                </a:solidFill>
+                <a:latin typeface="Georgia"/>
+              </a:rPr>
+              <a:t>0.34 ms  becomes  65.95 ms</a:t>
+            </a:r>
+          </a:p>
+        </p:txBody>
+      </p:sp>
+      <p:sp>
+        <p:nvSpPr>
+          <p:cNvPr id="7" name="TextBox 6"/>
+          <p:cNvSpPr txBox="1"/>
+          <p:nvPr/>
+        </p:nvSpPr>
+        <p:spPr>
+          <a:xfrm>
+            <a:off x="6858000" y="2240280"/>
+            <a:ext cx="4480560" cy="3657600"/>
+          </a:xfrm>
+          <a:prstGeom prst="rect">
+            <a:avLst/>
+          </a:prstGeom>
+          <a:noFill/>
+        </p:spPr>
+        <p:txBody>
+          <a:bodyPr wrap="square" lIns="0" tIns="0" rIns="0" bIns="0" anchor="t">
+            <a:spAutoFit/>
+          </a:bodyPr>
+          <a:lstStyle/>
+          <a:p>
+            <a:pPr algn="l">
+              <a:lnSpc>
+                <a:spcPct val="132000"/>
+              </a:lnSpc>
+            </a:pPr>
+            <a:r>
+              <a:rPr sz="1700" b="1">
+                <a:solidFill>
+                  <a:srgbClr val="F2EFEA"/>
+                </a:solidFill>
+                <a:latin typeface="Segoe UI"/>
+              </a:rPr>
+              <a:t>Bad choices: 2.3%  becomes  73.3%</a:t>
+            </a:r>
+          </a:p>
+          <a:p>
+            <a:pPr algn="l">
+              <a:lnSpc>
+                <a:spcPct val="132000"/>
+              </a:lnSpc>
+            </a:pPr>
+            <a:endParaRPr sz="1700" b="1">
+              <a:solidFill>
+                <a:srgbClr val="F2EFEA"/>
+              </a:solidFill>
+              <a:latin typeface="Segoe UI"/>
+            </a:endParaRPr>
+          </a:p>
+          <a:p>
+            <a:pPr algn="l">
+              <a:lnSpc>
+                <a:spcPct val="132000"/>
+              </a:lnSpc>
+            </a:pPr>
+            <a:r>
+              <a:rPr sz="1400" b="1">
+                <a:solidFill>
+                  <a:srgbClr val="E27660"/>
+                </a:solidFill>
+                <a:latin typeface="Segoe UI"/>
+              </a:rPr>
+              <a:t>The cause, in one sentence</a:t>
+            </a:r>
+          </a:p>
+          <a:p>
+            <a:pPr algn="l">
+              <a:lnSpc>
+                <a:spcPct val="132000"/>
+              </a:lnSpc>
+            </a:pPr>
+            <a:endParaRPr sz="1400" b="1">
+              <a:solidFill>
+                <a:srgbClr val="E27660"/>
+              </a:solidFill>
+              <a:latin typeface="Segoe UI"/>
+            </a:endParaRPr>
+          </a:p>
+          <a:p>
+            <a:pPr algn="l">
+              <a:lnSpc>
+                <a:spcPct val="132000"/>
+              </a:lnSpc>
+            </a:pPr>
+            <a:r>
+              <a:rPr sz="1550" b="0">
+                <a:solidFill>
+                  <a:srgbClr val="F2EFEA"/>
+                </a:solidFill>
+                <a:latin typeface="Segoe UI"/>
+              </a:rPr>
+              <a:t>When two indexes can answer the same query, PostgreSQL keeps whichever is cheaper to read, and ignores the work the query then does on the table.</a:t>
+            </a:r>
+          </a:p>
+          <a:p>
+            <a:pPr algn="l">
+              <a:lnSpc>
+                <a:spcPct val="132000"/>
+              </a:lnSpc>
+            </a:pPr>
+            <a:endParaRPr sz="1550" b="0">
+              <a:solidFill>
+                <a:srgbClr val="F2EFEA"/>
+              </a:solidFill>
+              <a:latin typeface="Segoe UI"/>
+            </a:endParaRPr>
+          </a:p>
+          <a:p>
+            <a:pPr algn="l">
+              <a:lnSpc>
+                <a:spcPct val="132000"/>
+              </a:lnSpc>
+            </a:pPr>
+            <a:r>
+              <a:rPr sz="1550" b="1">
+                <a:solidFill>
+                  <a:srgbClr val="F2EFEA"/>
+                </a:solidFill>
+                <a:latin typeface="Segoe UI"/>
+              </a:rPr>
+              <a:t>A BRIN index is tiny, so it always wins that comparison. The index it discards is the fast one.</a:t>
+            </a:r>
+          </a:p>
+        </p:txBody>
+      </p:sp>
+      <p:sp>
+        <p:nvSpPr>
+          <p:cNvPr id="8" name="TextBox 7"/>
+          <p:cNvSpPr txBox="1"/>
+          <p:nvPr/>
+        </p:nvSpPr>
+        <p:spPr>
+          <a:xfrm>
+            <a:off x="822960" y="6108192"/>
+            <a:ext cx="10546080" cy="365760"/>
+          </a:xfrm>
+          <a:prstGeom prst="rect">
+            <a:avLst/>
+          </a:prstGeom>
+          <a:noFill/>
+        </p:spPr>
+        <p:txBody>
+          <a:bodyPr wrap="square" lIns="0" tIns="0" rIns="0" bIns="0" anchor="t">
+            <a:spAutoFit/>
+          </a:bodyPr>
+          <a:lstStyle/>
+          <a:p>
+            <a:pPr algn="l">
+              <a:lnSpc>
+                <a:spcPct val="120000"/>
+              </a:lnSpc>
+            </a:pPr>
+            <a:r>
+              <a:rPr sz="1050" b="0">
+                <a:solidFill>
+                  <a:srgbClr val="92989E"/>
+                </a:solidFill>
+                <a:latin typeface="Segoe UI"/>
+              </a:rPr>
+              <a:t>Only while the table still fits in the buffer pool, which is exactly the size at which BRIN is recommended as free.</a:t>
+            </a:r>
+          </a:p>
+        </p:txBody>
+      </p:sp>
+      <p:sp>
+        <p:nvSpPr>
+          <p:cNvPr id="9" name="TextBox 8"/>
+          <p:cNvSpPr txBox="1"/>
+          <p:nvPr/>
+        </p:nvSpPr>
+        <p:spPr>
+          <a:xfrm>
+            <a:off x="10728960" y="6327648"/>
+            <a:ext cx="640080" cy="274320"/>
+          </a:xfrm>
+          <a:prstGeom prst="rect">
+            <a:avLst/>
+          </a:prstGeom>
+          <a:noFill/>
+        </p:spPr>
+        <p:txBody>
+          <a:bodyPr wrap="square" lIns="0" tIns="0" rIns="0" bIns="0" anchor="t">
+            <a:spAutoFit/>
+          </a:bodyPr>
+          <a:lstStyle/>
+          <a:p>
+            <a:pPr algn="r">
+              <a:lnSpc>
+                <a:spcPct val="100000"/>
+              </a:lnSpc>
+            </a:pPr>
+            <a:r>
+              <a:rPr sz="1000" b="0">
+                <a:solidFill>
+                  <a:srgbClr val="4A5056"/>
+                </a:solidFill>
+                <a:latin typeface="Segoe UI"/>
+              </a:rPr>
+              <a:t>9</a:t>
+            </a:r>
+          </a:p>
+        </p:txBody>
+      </p:sp>
+    </p:spTree>
+  </p:cSld>
+  <p:clrMapOvr>
+    <a:masterClrMapping/>
+  </p:clrMapOvr>
+</p:sld>
+</file>
+
+<file path=ppt/slides/slide11.xml><?xml version="1.0" encoding="utf-8"?>
+<p:sld xmlns:a="http://schemas.openxmlformats.org/drawingml/2006/main" xmlns:r="http://schemas.openxmlformats.org/officeDocument/2006/relationships" xmlns:p="http://schemas.openxmlformats.org/presentationml/2006/main">
   <p:cSld>
     <p:bg>
       <p:bgPr>
@@ -4246,7 +4752,14 @@
         <p:cNvGrpSpPr/>
         <p:nvPr/>
       </p:nvGrpSpPr>
-      <p:grpSpPr/>
+      <p:grpSpPr>
+        <a:xfrm>
+          <a:off x="0" y="0"/>
+          <a:ext cx="0" cy="0"/>
+          <a:chOff x="0" y="0"/>
+          <a:chExt cx="0" cy="0"/>
+        </a:xfrm>
+      </p:grpSpPr>
       <p:sp>
         <p:nvSpPr>
           <p:cNvPr id="2" name="TextBox 1"/>
@@ -4264,7 +4777,7 @@
           <a:noFill/>
         </p:spPr>
         <p:txBody>
-          <a:bodyPr wrap="square" anchor="t" lIns="0" rIns="0" tIns="0" bIns="0">
+          <a:bodyPr wrap="square" lIns="0" tIns="0" rIns="0" bIns="0" anchor="t">
             <a:spAutoFit/>
           </a:bodyPr>
           <a:lstStyle/>
@@ -4303,7 +4816,7 @@
           <a:noFill/>
         </p:spPr>
         <p:txBody>
-          <a:bodyPr wrap="square" anchor="t" lIns="0" rIns="0" tIns="0" bIns="0">
+          <a:bodyPr wrap="square" lIns="0" tIns="0" rIns="0" bIns="0" anchor="t">
             <a:spAutoFit/>
           </a:bodyPr>
           <a:lstStyle/>
@@ -4366,7 +4879,7 @@
           <a:noFill/>
         </p:spPr>
         <p:txBody>
-          <a:bodyPr wrap="square" anchor="t" lIns="0" rIns="0" tIns="0" bIns="0">
+          <a:bodyPr wrap="square" lIns="0" tIns="0" rIns="0" bIns="0" anchor="t">
             <a:spAutoFit/>
           </a:bodyPr>
           <a:lstStyle/>
@@ -4405,7 +4918,7 @@
           <a:noFill/>
         </p:spPr>
         <p:txBody>
-          <a:bodyPr wrap="square" anchor="t" lIns="0" rIns="0" tIns="0" bIns="0">
+          <a:bodyPr wrap="square" lIns="0" tIns="0" rIns="0" bIns="0" anchor="t">
             <a:spAutoFit/>
           </a:bodyPr>
           <a:lstStyle/>
@@ -4416,7 +4929,7 @@
               </a:lnSpc>
             </a:pPr>
             <a:r>
-              <a:rPr sz="1600" b="1">
+              <a:rPr sz="1600" b="1" dirty="0">
                 <a:solidFill>
                   <a:srgbClr val="1F4E5F"/>
                 </a:solidFill>
@@ -4432,7 +4945,7 @@
               </a:lnSpc>
             </a:pPr>
             <a:r>
-              <a:rPr sz="1500" b="0">
+              <a:rPr sz="1500" b="0" dirty="0">
                 <a:solidFill>
                   <a:srgbClr val="1A1D21"/>
                 </a:solidFill>
@@ -4447,14 +4960,43 @@
                 <a:spcPct val="132000"/>
               </a:lnSpc>
             </a:pPr>
-            <a:r>
-              <a:rPr sz="1000" b="0">
+            <a:endParaRPr sz="1500" b="0" dirty="0">
+              <a:solidFill>
+                <a:srgbClr val="1A1D21"/>
+              </a:solidFill>
+              <a:latin typeface="Segoe UI"/>
+            </a:endParaRPr>
+          </a:p>
+          <a:p>
+            <a:pPr algn="l">
+              <a:lnSpc>
+                <a:spcPct val="132000"/>
+              </a:lnSpc>
+            </a:pPr>
+            <a:r>
+              <a:rPr sz="1600" b="1" dirty="0">
+                <a:solidFill>
+                  <a:srgbClr val="A8322A"/>
+                </a:solidFill>
+                <a:latin typeface="Segoe UI"/>
+              </a:rPr>
+              <a:t>MariaDB</a:t>
+            </a:r>
+          </a:p>
+          <a:p>
+            <a:pPr algn="l">
+              <a:lnSpc>
+                <a:spcPct val="132000"/>
+              </a:lnSpc>
+            </a:pPr>
+            <a:r>
+              <a:rPr sz="1500" b="0" dirty="0">
                 <a:solidFill>
                   <a:srgbClr val="1A1D21"/>
                 </a:solidFill>
                 <a:latin typeface="Segoe UI"/>
               </a:rPr>
-              <a:t/>
+              <a:t>gets wrong less often, 53% down to 12%, but its worst case climbs to 30.9x.</a:t>
             </a:r>
           </a:p>
           <a:p>
@@ -4463,15 +5005,12 @@
                 <a:spcPct val="132000"/>
               </a:lnSpc>
             </a:pPr>
-            <a:r>
-              <a:rPr sz="1600" b="1">
-                <a:solidFill>
-                  <a:srgbClr val="A8322A"/>
-                </a:solidFill>
-                <a:latin typeface="Segoe UI"/>
-              </a:rPr>
-              <a:t>MariaDB</a:t>
-            </a:r>
+            <a:endParaRPr sz="1500" b="0" dirty="0">
+              <a:solidFill>
+                <a:srgbClr val="1A1D21"/>
+              </a:solidFill>
+              <a:latin typeface="Segoe UI"/>
+            </a:endParaRPr>
           </a:p>
           <a:p>
             <a:pPr algn="l">
@@ -4480,39 +5019,7 @@
               </a:lnSpc>
             </a:pPr>
             <a:r>
-              <a:rPr sz="1500" b="0">
-                <a:solidFill>
-                  <a:srgbClr val="1A1D21"/>
-                </a:solidFill>
-                <a:latin typeface="Segoe UI"/>
-              </a:rPr>
-              <a:t>gets wrong less often, 53% down to 12%, but its worst case climbs to 30.9x.</a:t>
-            </a:r>
-          </a:p>
-          <a:p>
-            <a:pPr algn="l">
-              <a:lnSpc>
-                <a:spcPct val="132000"/>
-              </a:lnSpc>
-            </a:pPr>
-            <a:r>
-              <a:rPr sz="1200" b="0">
-                <a:solidFill>
-                  <a:srgbClr val="1A1D21"/>
-                </a:solidFill>
-                <a:latin typeface="Segoe UI"/>
-              </a:rPr>
-              <a:t/>
-            </a:r>
-          </a:p>
-          <a:p>
-            <a:pPr algn="l">
-              <a:lnSpc>
-                <a:spcPct val="132000"/>
-              </a:lnSpc>
-            </a:pPr>
-            <a:r>
-              <a:rPr sz="1550" b="1">
+              <a:rPr sz="1550" b="1" dirty="0">
                 <a:solidFill>
                   <a:srgbClr val="1A1D21"/>
                 </a:solidFill>
@@ -4540,7 +5047,7 @@
           <a:noFill/>
         </p:spPr>
         <p:txBody>
-          <a:bodyPr wrap="square" anchor="t" lIns="0" rIns="0" tIns="0" bIns="0">
+          <a:bodyPr wrap="square" lIns="0" tIns="0" rIns="0" bIns="0" anchor="t">
             <a:spAutoFit/>
           </a:bodyPr>
           <a:lstStyle/>
@@ -4579,7 +5086,7 @@
           <a:noFill/>
         </p:spPr>
         <p:txBody>
-          <a:bodyPr wrap="square" anchor="t" lIns="0" rIns="0" tIns="0" bIns="0">
+          <a:bodyPr wrap="square" lIns="0" tIns="0" rIns="0" bIns="0" anchor="t">
             <a:spAutoFit/>
           </a:bodyPr>
           <a:lstStyle/>
@@ -4609,8 +5116,8 @@
 </p:sld>
 </file>
 
-<file path=ppt/slides/slide11.xml><?xml version="1.0" encoding="utf-8"?>
-<p:sld xmlns:a="http://schemas.openxmlformats.org/drawingml/2006/main" xmlns:p="http://schemas.openxmlformats.org/presentationml/2006/main" xmlns:r="http://schemas.openxmlformats.org/officeDocument/2006/relationships">
+<file path=ppt/slides/slide12.xml><?xml version="1.0" encoding="utf-8"?>
+<p:sld xmlns:a="http://schemas.openxmlformats.org/drawingml/2006/main" xmlns:r="http://schemas.openxmlformats.org/officeDocument/2006/relationships" xmlns:p="http://schemas.openxmlformats.org/presentationml/2006/main">
   <p:cSld>
     <p:bg>
       <p:bgPr>
@@ -4626,7 +5133,14 @@
         <p:cNvGrpSpPr/>
         <p:nvPr/>
       </p:nvGrpSpPr>
-      <p:grpSpPr/>
+      <p:grpSpPr>
+        <a:xfrm>
+          <a:off x="0" y="0"/>
+          <a:ext cx="0" cy="0"/>
+          <a:chOff x="0" y="0"/>
+          <a:chExt cx="0" cy="0"/>
+        </a:xfrm>
+      </p:grpSpPr>
       <p:sp>
         <p:nvSpPr>
           <p:cNvPr id="2" name="TextBox 1"/>
@@ -4644,7 +5158,7 @@
           <a:noFill/>
         </p:spPr>
         <p:txBody>
-          <a:bodyPr wrap="square" anchor="t" lIns="0" rIns="0" tIns="0" bIns="0">
+          <a:bodyPr wrap="square" lIns="0" tIns="0" rIns="0" bIns="0" anchor="t">
             <a:spAutoFit/>
           </a:bodyPr>
           <a:lstStyle/>
@@ -4683,7 +5197,7 @@
           <a:noFill/>
         </p:spPr>
         <p:txBody>
-          <a:bodyPr wrap="square" anchor="t" lIns="0" rIns="0" tIns="0" bIns="0">
+          <a:bodyPr wrap="square" lIns="0" tIns="0" rIns="0" bIns="0" anchor="t">
             <a:spAutoFit/>
           </a:bodyPr>
           <a:lstStyle/>
@@ -4746,6 +5260,7 @@
           <a:lstStyle/>
           <a:p>
             <a:pPr algn="ctr"/>
+            <a:endParaRPr/>
           </a:p>
         </p:txBody>
       </p:sp>
@@ -4766,7 +5281,7 @@
           <a:noFill/>
         </p:spPr>
         <p:txBody>
-          <a:bodyPr wrap="square" anchor="t" lIns="0" rIns="0" tIns="0" bIns="0">
+          <a:bodyPr wrap="square" lIns="0" tIns="0" rIns="0" bIns="0" anchor="t">
             <a:spAutoFit/>
           </a:bodyPr>
           <a:lstStyle/>
@@ -4805,7 +5320,7 @@
           <a:noFill/>
         </p:spPr>
         <p:txBody>
-          <a:bodyPr wrap="square" anchor="t" lIns="0" rIns="0" tIns="0" bIns="0">
+          <a:bodyPr wrap="square" lIns="0" tIns="0" rIns="0" bIns="0" anchor="t">
             <a:spAutoFit/>
           </a:bodyPr>
           <a:lstStyle/>
@@ -4844,7 +5359,7 @@
           <a:noFill/>
         </p:spPr>
         <p:txBody>
-          <a:bodyPr wrap="square" anchor="t" lIns="0" rIns="0" tIns="0" bIns="0">
+          <a:bodyPr wrap="square" lIns="0" tIns="0" rIns="0" bIns="0" anchor="t">
             <a:spAutoFit/>
           </a:bodyPr>
           <a:lstStyle/>
@@ -4899,7 +5414,7 @@
           <a:noFill/>
         </p:spPr>
         <p:txBody>
-          <a:bodyPr wrap="square" anchor="t" lIns="0" rIns="0" tIns="0" bIns="0">
+          <a:bodyPr wrap="square" lIns="0" tIns="0" rIns="0" bIns="0" anchor="t">
             <a:spAutoFit/>
           </a:bodyPr>
           <a:lstStyle/>
@@ -4938,7 +5453,7 @@
           <a:noFill/>
         </p:spPr>
         <p:txBody>
-          <a:bodyPr wrap="square" anchor="t" lIns="0" rIns="0" tIns="0" bIns="0">
+          <a:bodyPr wrap="square" lIns="0" tIns="0" rIns="0" bIns="0" anchor="t">
             <a:spAutoFit/>
           </a:bodyPr>
           <a:lstStyle/>
@@ -5001,6 +5516,7 @@
           <a:lstStyle/>
           <a:p>
             <a:pPr algn="ctr"/>
+            <a:endParaRPr/>
           </a:p>
         </p:txBody>
       </p:sp>
@@ -5021,7 +5537,7 @@
           <a:noFill/>
         </p:spPr>
         <p:txBody>
-          <a:bodyPr wrap="square" anchor="t" lIns="0" rIns="0" tIns="0" bIns="0">
+          <a:bodyPr wrap="square" lIns="0" tIns="0" rIns="0" bIns="0" anchor="t">
             <a:spAutoFit/>
           </a:bodyPr>
           <a:lstStyle/>
@@ -5076,7 +5592,7 @@
           <a:noFill/>
         </p:spPr>
         <p:txBody>
-          <a:bodyPr wrap="square" anchor="t" lIns="0" rIns="0" tIns="0" bIns="0">
+          <a:bodyPr wrap="square" lIns="0" tIns="0" rIns="0" bIns="0" anchor="t">
             <a:spAutoFit/>
           </a:bodyPr>
           <a:lstStyle/>
@@ -5115,7 +5631,7 @@
           <a:noFill/>
         </p:spPr>
         <p:txBody>
-          <a:bodyPr wrap="square" anchor="t" lIns="0" rIns="0" tIns="0" bIns="0">
+          <a:bodyPr wrap="square" lIns="0" tIns="0" rIns="0" bIns="0" anchor="t">
             <a:spAutoFit/>
           </a:bodyPr>
           <a:lstStyle/>
@@ -5178,6 +5694,7 @@
           <a:lstStyle/>
           <a:p>
             <a:pPr algn="ctr"/>
+            <a:endParaRPr/>
           </a:p>
         </p:txBody>
       </p:sp>
@@ -5198,7 +5715,7 @@
           <a:noFill/>
         </p:spPr>
         <p:txBody>
-          <a:bodyPr wrap="square" anchor="t" lIns="0" rIns="0" tIns="0" bIns="0">
+          <a:bodyPr wrap="square" lIns="0" tIns="0" rIns="0" bIns="0" anchor="t">
             <a:spAutoFit/>
           </a:bodyPr>
           <a:lstStyle/>
@@ -5253,7 +5770,7 @@
           <a:noFill/>
         </p:spPr>
         <p:txBody>
-          <a:bodyPr wrap="square" anchor="t" lIns="0" rIns="0" tIns="0" bIns="0">
+          <a:bodyPr wrap="square" lIns="0" tIns="0" rIns="0" bIns="0" anchor="t">
             <a:spAutoFit/>
           </a:bodyPr>
           <a:lstStyle/>
@@ -5292,7 +5809,7 @@
           <a:noFill/>
         </p:spPr>
         <p:txBody>
-          <a:bodyPr wrap="square" anchor="t" lIns="0" rIns="0" tIns="0" bIns="0">
+          <a:bodyPr wrap="square" lIns="0" tIns="0" rIns="0" bIns="0" anchor="t">
             <a:spAutoFit/>
           </a:bodyPr>
           <a:lstStyle/>
@@ -5355,6 +5872,7 @@
           <a:lstStyle/>
           <a:p>
             <a:pPr algn="ctr"/>
+            <a:endParaRPr/>
           </a:p>
         </p:txBody>
       </p:sp>
@@ -5375,7 +5893,7 @@
           <a:noFill/>
         </p:spPr>
         <p:txBody>
-          <a:bodyPr wrap="square" anchor="t" lIns="0" rIns="0" tIns="0" bIns="0">
+          <a:bodyPr wrap="square" lIns="0" tIns="0" rIns="0" bIns="0" anchor="t">
             <a:spAutoFit/>
           </a:bodyPr>
           <a:lstStyle/>
@@ -5430,7 +5948,7 @@
           <a:noFill/>
         </p:spPr>
         <p:txBody>
-          <a:bodyPr wrap="square" anchor="t" lIns="0" rIns="0" tIns="0" bIns="0">
+          <a:bodyPr wrap="square" lIns="0" tIns="0" rIns="0" bIns="0" anchor="t">
             <a:spAutoFit/>
           </a:bodyPr>
           <a:lstStyle/>
@@ -5469,7 +5987,7 @@
           <a:noFill/>
         </p:spPr>
         <p:txBody>
-          <a:bodyPr wrap="square" anchor="t" lIns="0" rIns="0" tIns="0" bIns="0">
+          <a:bodyPr wrap="square" lIns="0" tIns="0" rIns="0" bIns="0" anchor="t">
             <a:spAutoFit/>
           </a:bodyPr>
           <a:lstStyle/>
@@ -5508,7 +6026,7 @@
           <a:noFill/>
         </p:spPr>
         <p:txBody>
-          <a:bodyPr wrap="square" anchor="t" lIns="0" rIns="0" tIns="0" bIns="0">
+          <a:bodyPr wrap="square" lIns="0" tIns="0" rIns="0" bIns="0" anchor="t">
             <a:spAutoFit/>
           </a:bodyPr>
           <a:lstStyle/>
@@ -5547,7 +6065,7 @@
           <a:noFill/>
         </p:spPr>
         <p:txBody>
-          <a:bodyPr wrap="square" anchor="t" lIns="0" rIns="0" tIns="0" bIns="0">
+          <a:bodyPr wrap="square" lIns="0" tIns="0" rIns="0" bIns="0" anchor="t">
             <a:spAutoFit/>
           </a:bodyPr>
           <a:lstStyle/>
@@ -5577,8 +6095,8 @@
 </p:sld>
 </file>
 
-<file path=ppt/slides/slide12.xml><?xml version="1.0" encoding="utf-8"?>
-<p:sld xmlns:a="http://schemas.openxmlformats.org/drawingml/2006/main" xmlns:p="http://schemas.openxmlformats.org/presentationml/2006/main" xmlns:r="http://schemas.openxmlformats.org/officeDocument/2006/relationships">
+<file path=ppt/slides/slide13.xml><?xml version="1.0" encoding="utf-8"?>
+<p:sld xmlns:a="http://schemas.openxmlformats.org/drawingml/2006/main" xmlns:r="http://schemas.openxmlformats.org/officeDocument/2006/relationships" xmlns:p="http://schemas.openxmlformats.org/presentationml/2006/main">
   <p:cSld>
     <p:bg>
       <p:bgPr>
@@ -5594,7 +6112,14 @@
         <p:cNvGrpSpPr/>
         <p:nvPr/>
       </p:nvGrpSpPr>
-      <p:grpSpPr/>
+      <p:grpSpPr>
+        <a:xfrm>
+          <a:off x="0" y="0"/>
+          <a:ext cx="0" cy="0"/>
+          <a:chOff x="0" y="0"/>
+          <a:chExt cx="0" cy="0"/>
+        </a:xfrm>
+      </p:grpSpPr>
       <p:sp>
         <p:nvSpPr>
           <p:cNvPr id="2" name="TextBox 1"/>
@@ -5612,7 +6137,7 @@
           <a:noFill/>
         </p:spPr>
         <p:txBody>
-          <a:bodyPr wrap="square" anchor="t" lIns="0" rIns="0" tIns="0" bIns="0">
+          <a:bodyPr wrap="square" lIns="0" tIns="0" rIns="0" bIns="0" anchor="t">
             <a:spAutoFit/>
           </a:bodyPr>
           <a:lstStyle/>
@@ -5651,7 +6176,7 @@
           <a:noFill/>
         </p:spPr>
         <p:txBody>
-          <a:bodyPr wrap="square" anchor="t" lIns="0" rIns="0" tIns="0" bIns="0">
+          <a:bodyPr wrap="square" lIns="0" tIns="0" rIns="0" bIns="0" anchor="t">
             <a:spAutoFit/>
           </a:bodyPr>
           <a:lstStyle/>
@@ -5714,6 +6239,7 @@
           <a:lstStyle/>
           <a:p>
             <a:pPr algn="ctr"/>
+            <a:endParaRPr/>
           </a:p>
         </p:txBody>
       </p:sp>
@@ -5734,7 +6260,7 @@
           <a:noFill/>
         </p:spPr>
         <p:txBody>
-          <a:bodyPr wrap="square" anchor="t" lIns="0" rIns="0" tIns="0" bIns="0">
+          <a:bodyPr wrap="square" lIns="0" tIns="0" rIns="0" bIns="0" anchor="t">
             <a:spAutoFit/>
           </a:bodyPr>
           <a:lstStyle/>
@@ -5773,7 +6299,7 @@
           <a:noFill/>
         </p:spPr>
         <p:txBody>
-          <a:bodyPr wrap="square" anchor="t" lIns="0" rIns="0" tIns="0" bIns="0">
+          <a:bodyPr wrap="square" lIns="0" tIns="0" rIns="0" bIns="0" anchor="t">
             <a:spAutoFit/>
           </a:bodyPr>
           <a:lstStyle/>
@@ -5812,7 +6338,7 @@
           <a:noFill/>
         </p:spPr>
         <p:txBody>
-          <a:bodyPr wrap="square" anchor="t" lIns="0" rIns="0" tIns="0" bIns="0">
+          <a:bodyPr wrap="square" lIns="0" tIns="0" rIns="0" bIns="0" anchor="t">
             <a:spAutoFit/>
           </a:bodyPr>
           <a:lstStyle/>
@@ -5867,7 +6393,7 @@
           <a:noFill/>
         </p:spPr>
         <p:txBody>
-          <a:bodyPr wrap="square" anchor="t" lIns="0" rIns="0" tIns="0" bIns="0">
+          <a:bodyPr wrap="square" lIns="0" tIns="0" rIns="0" bIns="0" anchor="t">
             <a:spAutoFit/>
           </a:bodyPr>
           <a:lstStyle/>
@@ -5906,7 +6432,7 @@
           <a:noFill/>
         </p:spPr>
         <p:txBody>
-          <a:bodyPr wrap="square" anchor="t" lIns="0" rIns="0" tIns="0" bIns="0">
+          <a:bodyPr wrap="square" lIns="0" tIns="0" rIns="0" bIns="0" anchor="t">
             <a:spAutoFit/>
           </a:bodyPr>
           <a:lstStyle/>
@@ -5961,7 +6487,7 @@
           <a:noFill/>
         </p:spPr>
         <p:txBody>
-          <a:bodyPr wrap="square" anchor="t" lIns="0" rIns="0" tIns="0" bIns="0">
+          <a:bodyPr wrap="square" lIns="0" tIns="0" rIns="0" bIns="0" anchor="t">
             <a:spAutoFit/>
           </a:bodyPr>
           <a:lstStyle/>
@@ -6000,7 +6526,7 @@
           <a:noFill/>
         </p:spPr>
         <p:txBody>
-          <a:bodyPr wrap="square" anchor="t" lIns="0" rIns="0" tIns="0" bIns="0">
+          <a:bodyPr wrap="square" lIns="0" tIns="0" rIns="0" bIns="0" anchor="t">
             <a:spAutoFit/>
           </a:bodyPr>
           <a:lstStyle/>
@@ -6055,7 +6581,7 @@
           <a:noFill/>
         </p:spPr>
         <p:txBody>
-          <a:bodyPr wrap="square" anchor="t" lIns="0" rIns="0" tIns="0" bIns="0">
+          <a:bodyPr wrap="square" lIns="0" tIns="0" rIns="0" bIns="0" anchor="t">
             <a:spAutoFit/>
           </a:bodyPr>
           <a:lstStyle/>
@@ -6094,7 +6620,7 @@
           <a:noFill/>
         </p:spPr>
         <p:txBody>
-          <a:bodyPr wrap="square" anchor="t" lIns="0" rIns="0" tIns="0" bIns="0">
+          <a:bodyPr wrap="square" lIns="0" tIns="0" rIns="0" bIns="0" anchor="t">
             <a:spAutoFit/>
           </a:bodyPr>
           <a:lstStyle/>
@@ -6149,7 +6675,7 @@
           <a:noFill/>
         </p:spPr>
         <p:txBody>
-          <a:bodyPr wrap="square" anchor="t" lIns="0" rIns="0" tIns="0" bIns="0">
+          <a:bodyPr wrap="square" lIns="0" tIns="0" rIns="0" bIns="0" anchor="t">
             <a:spAutoFit/>
           </a:bodyPr>
           <a:lstStyle/>
@@ -6188,7 +6714,7 @@
           <a:noFill/>
         </p:spPr>
         <p:txBody>
-          <a:bodyPr wrap="square" anchor="t" lIns="0" rIns="0" tIns="0" bIns="0">
+          <a:bodyPr wrap="square" lIns="0" tIns="0" rIns="0" bIns="0" anchor="t">
             <a:spAutoFit/>
           </a:bodyPr>
           <a:lstStyle/>
@@ -6227,7 +6753,7 @@
           <a:noFill/>
         </p:spPr>
         <p:txBody>
-          <a:bodyPr wrap="square" anchor="t" lIns="0" rIns="0" tIns="0" bIns="0">
+          <a:bodyPr wrap="square" lIns="0" tIns="0" rIns="0" bIns="0" anchor="t">
             <a:spAutoFit/>
           </a:bodyPr>
           <a:lstStyle/>
@@ -6282,7 +6808,7 @@
           <a:noFill/>
         </p:spPr>
         <p:txBody>
-          <a:bodyPr wrap="square" anchor="t" lIns="0" rIns="0" tIns="0" bIns="0">
+          <a:bodyPr wrap="square" lIns="0" tIns="0" rIns="0" bIns="0" anchor="t">
             <a:spAutoFit/>
           </a:bodyPr>
           <a:lstStyle/>
@@ -6321,7 +6847,7 @@
           <a:noFill/>
         </p:spPr>
         <p:txBody>
-          <a:bodyPr wrap="square" anchor="t" lIns="0" rIns="0" tIns="0" bIns="0">
+          <a:bodyPr wrap="square" lIns="0" tIns="0" rIns="0" bIns="0" anchor="t">
             <a:spAutoFit/>
           </a:bodyPr>
           <a:lstStyle/>
@@ -6376,7 +6902,7 @@
           <a:noFill/>
         </p:spPr>
         <p:txBody>
-          <a:bodyPr wrap="square" anchor="t" lIns="0" rIns="0" tIns="0" bIns="0">
+          <a:bodyPr wrap="square" lIns="0" tIns="0" rIns="0" bIns="0" anchor="t">
             <a:spAutoFit/>
           </a:bodyPr>
           <a:lstStyle/>
@@ -6415,7 +6941,7 @@
           <a:noFill/>
         </p:spPr>
         <p:txBody>
-          <a:bodyPr wrap="square" anchor="t" lIns="0" rIns="0" tIns="0" bIns="0">
+          <a:bodyPr wrap="square" lIns="0" tIns="0" rIns="0" bIns="0" anchor="t">
             <a:spAutoFit/>
           </a:bodyPr>
           <a:lstStyle/>
@@ -6470,7 +6996,7 @@
           <a:noFill/>
         </p:spPr>
         <p:txBody>
-          <a:bodyPr wrap="square" anchor="t" lIns="0" rIns="0" tIns="0" bIns="0">
+          <a:bodyPr wrap="square" lIns="0" tIns="0" rIns="0" bIns="0" anchor="t">
             <a:spAutoFit/>
           </a:bodyPr>
           <a:lstStyle/>
@@ -6509,7 +7035,7 @@
           <a:noFill/>
         </p:spPr>
         <p:txBody>
-          <a:bodyPr wrap="square" anchor="t" lIns="0" rIns="0" tIns="0" bIns="0">
+          <a:bodyPr wrap="square" lIns="0" tIns="0" rIns="0" bIns="0" anchor="t">
             <a:spAutoFit/>
           </a:bodyPr>
           <a:lstStyle/>
@@ -6588,6 +7114,7 @@
           <a:lstStyle/>
           <a:p>
             <a:pPr algn="ctr"/>
+            <a:endParaRPr/>
           </a:p>
         </p:txBody>
       </p:sp>
@@ -6608,7 +7135,7 @@
           <a:noFill/>
         </p:spPr>
         <p:txBody>
-          <a:bodyPr wrap="square" anchor="t" lIns="0" rIns="0" tIns="0" bIns="0">
+          <a:bodyPr wrap="square" lIns="0" tIns="0" rIns="0" bIns="0" anchor="t">
             <a:spAutoFit/>
           </a:bodyPr>
           <a:lstStyle/>
@@ -6647,7 +7174,7 @@
           <a:noFill/>
         </p:spPr>
         <p:txBody>
-          <a:bodyPr wrap="square" anchor="t" lIns="0" rIns="0" tIns="0" bIns="0">
+          <a:bodyPr wrap="square" lIns="0" tIns="0" rIns="0" bIns="0" anchor="t">
             <a:spAutoFit/>
           </a:bodyPr>
           <a:lstStyle/>
@@ -11402,7 +11929,2270 @@
 </file>
 
 <file path=ppt/slides/slide7.xml><?xml version="1.0" encoding="utf-8"?>
-<p:sld xmlns:a="http://schemas.openxmlformats.org/drawingml/2006/main" xmlns:p="http://schemas.openxmlformats.org/presentationml/2006/main" xmlns:r="http://schemas.openxmlformats.org/officeDocument/2006/relationships">
+<p:sld xmlns:a="http://schemas.openxmlformats.org/drawingml/2006/main" xmlns:r="http://schemas.openxmlformats.org/officeDocument/2006/relationships" xmlns:p="http://schemas.openxmlformats.org/presentationml/2006/main">
+  <p:cSld>
+    <p:spTree>
+      <p:nvGrpSpPr>
+        <p:cNvPr id="1" name=""/>
+        <p:cNvGrpSpPr/>
+        <p:nvPr/>
+      </p:nvGrpSpPr>
+      <p:grpSpPr>
+        <a:xfrm>
+          <a:off x="0" y="0"/>
+          <a:ext cx="0" cy="0"/>
+          <a:chOff x="0" y="0"/>
+          <a:chExt cx="0" cy="0"/>
+        </a:xfrm>
+      </p:grpSpPr>
+      <p:sp>
+        <p:nvSpPr>
+          <p:cNvPr id="2" name="TextBox 1"/>
+          <p:cNvSpPr txBox="1"/>
+          <p:nvPr/>
+        </p:nvSpPr>
+        <p:spPr>
+          <a:xfrm>
+            <a:off x="822960" y="566928"/>
+            <a:ext cx="10545775" cy="274320"/>
+          </a:xfrm>
+          <a:prstGeom prst="rect">
+            <a:avLst/>
+          </a:prstGeom>
+          <a:noFill/>
+        </p:spPr>
+        <p:txBody>
+          <a:bodyPr wrap="square" lIns="0" tIns="0" rIns="0" bIns="0" anchor="t">
+            <a:spAutoFit/>
+          </a:bodyPr>
+          <a:lstStyle/>
+          <a:p>
+            <a:pPr algn="l">
+              <a:lnSpc>
+                <a:spcPct val="100000"/>
+              </a:lnSpc>
+            </a:pPr>
+            <a:r>
+              <a:rPr sz="1050" b="1">
+                <a:solidFill>
+                  <a:srgbClr val="A8322A"/>
+                </a:solidFill>
+                <a:latin typeface="Segoe UI"/>
+              </a:rPr>
+              <a:t>RESULT 1, DECOMPOSED</a:t>
+            </a:r>
+          </a:p>
+        </p:txBody>
+      </p:sp>
+      <p:sp>
+        <p:nvSpPr>
+          <p:cNvPr id="3" name="TextBox 2"/>
+          <p:cNvSpPr txBox="1"/>
+          <p:nvPr/>
+        </p:nvSpPr>
+        <p:spPr>
+          <a:xfrm>
+            <a:off x="822960" y="914400"/>
+            <a:ext cx="10545775" cy="1005840"/>
+          </a:xfrm>
+          <a:prstGeom prst="rect">
+            <a:avLst/>
+          </a:prstGeom>
+          <a:noFill/>
+        </p:spPr>
+        <p:txBody>
+          <a:bodyPr wrap="square" lIns="0" tIns="0" rIns="0" bIns="0" anchor="t">
+            <a:spAutoFit/>
+          </a:bodyPr>
+          <a:lstStyle/>
+          <a:p>
+            <a:pPr algn="l">
+              <a:lnSpc>
+                <a:spcPct val="112000"/>
+              </a:lnSpc>
+            </a:pPr>
+            <a:r>
+              <a:rPr sz="2900" b="0">
+                <a:solidFill>
+                  <a:srgbClr val="1A1D21"/>
+                </a:solidFill>
+                <a:latin typeface="Georgia"/>
+              </a:rPr>
+              <a:t>The two engines fail on different families</a:t>
+            </a:r>
+          </a:p>
+        </p:txBody>
+      </p:sp>
+      <p:sp>
+        <p:nvSpPr>
+          <p:cNvPr id="4" name="TextBox 3"/>
+          <p:cNvSpPr txBox="1"/>
+          <p:nvPr/>
+        </p:nvSpPr>
+        <p:spPr>
+          <a:xfrm>
+            <a:off x="914400" y="1828800"/>
+            <a:ext cx="1051560" cy="502920"/>
+          </a:xfrm>
+          <a:prstGeom prst="rect">
+            <a:avLst/>
+          </a:prstGeom>
+          <a:noFill/>
+        </p:spPr>
+        <p:txBody>
+          <a:bodyPr wrap="square" lIns="0" tIns="0" rIns="0" bIns="0" anchor="b">
+            <a:spAutoFit/>
+          </a:bodyPr>
+          <a:lstStyle/>
+          <a:p>
+            <a:pPr algn="l">
+              <a:lnSpc>
+                <a:spcPct val="110000"/>
+              </a:lnSpc>
+            </a:pPr>
+            <a:r>
+              <a:rPr sz="1000" b="1">
+                <a:solidFill>
+                  <a:srgbClr val="70757A"/>
+                </a:solidFill>
+                <a:latin typeface="Segoe UI"/>
+              </a:rPr>
+              <a:t>Family</a:t>
+            </a:r>
+          </a:p>
+        </p:txBody>
+      </p:sp>
+      <p:sp>
+        <p:nvSpPr>
+          <p:cNvPr id="5" name="TextBox 4"/>
+          <p:cNvSpPr txBox="1"/>
+          <p:nvPr/>
+        </p:nvSpPr>
+        <p:spPr>
+          <a:xfrm>
+            <a:off x="2148840" y="1828800"/>
+            <a:ext cx="502920" cy="502920"/>
+          </a:xfrm>
+          <a:prstGeom prst="rect">
+            <a:avLst/>
+          </a:prstGeom>
+          <a:noFill/>
+        </p:spPr>
+        <p:txBody>
+          <a:bodyPr wrap="square" lIns="0" tIns="0" rIns="0" bIns="0" anchor="b">
+            <a:spAutoFit/>
+          </a:bodyPr>
+          <a:lstStyle/>
+          <a:p>
+            <a:pPr algn="r">
+              <a:lnSpc>
+                <a:spcPct val="110000"/>
+              </a:lnSpc>
+            </a:pPr>
+            <a:r>
+              <a:rPr sz="1000" b="1">
+                <a:solidFill>
+                  <a:srgbClr val="70757A"/>
+                </a:solidFill>
+                <a:latin typeface="Segoe UI"/>
+              </a:rPr>
+              <a:t>PG n</a:t>
+            </a:r>
+          </a:p>
+        </p:txBody>
+      </p:sp>
+      <p:sp>
+        <p:nvSpPr>
+          <p:cNvPr id="6" name="TextBox 5"/>
+          <p:cNvSpPr txBox="1"/>
+          <p:nvPr/>
+        </p:nvSpPr>
+        <p:spPr>
+          <a:xfrm>
+            <a:off x="2834640" y="1828800"/>
+            <a:ext cx="914400" cy="502920"/>
+          </a:xfrm>
+          <a:prstGeom prst="rect">
+            <a:avLst/>
+          </a:prstGeom>
+          <a:noFill/>
+        </p:spPr>
+        <p:txBody>
+          <a:bodyPr wrap="square" lIns="0" tIns="0" rIns="0" bIns="0" anchor="b">
+            <a:spAutoFit/>
+          </a:bodyPr>
+          <a:lstStyle/>
+          <a:p>
+            <a:pPr algn="r">
+              <a:lnSpc>
+                <a:spcPct val="110000"/>
+              </a:lnSpc>
+            </a:pPr>
+            <a:r>
+              <a:rPr sz="1000" b="1">
+                <a:solidFill>
+                  <a:srgbClr val="70757A"/>
+                </a:solidFill>
+                <a:latin typeface="Segoe UI"/>
+              </a:rPr>
+              <a:t>PG wrong</a:t>
+            </a:r>
+          </a:p>
+        </p:txBody>
+      </p:sp>
+      <p:sp>
+        <p:nvSpPr>
+          <p:cNvPr id="7" name="TextBox 6"/>
+          <p:cNvSpPr txBox="1"/>
+          <p:nvPr/>
+        </p:nvSpPr>
+        <p:spPr>
+          <a:xfrm>
+            <a:off x="3931920" y="1828800"/>
+            <a:ext cx="960120" cy="502920"/>
+          </a:xfrm>
+          <a:prstGeom prst="rect">
+            <a:avLst/>
+          </a:prstGeom>
+          <a:noFill/>
+        </p:spPr>
+        <p:txBody>
+          <a:bodyPr wrap="square" lIns="0" tIns="0" rIns="0" bIns="0" anchor="b">
+            <a:spAutoFit/>
+          </a:bodyPr>
+          <a:lstStyle/>
+          <a:p>
+            <a:pPr algn="r">
+              <a:lnSpc>
+                <a:spcPct val="110000"/>
+              </a:lnSpc>
+            </a:pPr>
+            <a:r>
+              <a:rPr sz="1000" b="1">
+                <a:solidFill>
+                  <a:srgbClr val="70757A"/>
+                </a:solidFill>
+                <a:latin typeface="Segoe UI"/>
+              </a:rPr>
+              <a:t>PG median</a:t>
+            </a:r>
+          </a:p>
+        </p:txBody>
+      </p:sp>
+      <p:sp>
+        <p:nvSpPr>
+          <p:cNvPr id="8" name="TextBox 7"/>
+          <p:cNvSpPr txBox="1"/>
+          <p:nvPr/>
+        </p:nvSpPr>
+        <p:spPr>
+          <a:xfrm>
+            <a:off x="5074920" y="1828800"/>
+            <a:ext cx="960120" cy="502920"/>
+          </a:xfrm>
+          <a:prstGeom prst="rect">
+            <a:avLst/>
+          </a:prstGeom>
+          <a:noFill/>
+        </p:spPr>
+        <p:txBody>
+          <a:bodyPr wrap="square" lIns="0" tIns="0" rIns="0" bIns="0" anchor="b">
+            <a:spAutoFit/>
+          </a:bodyPr>
+          <a:lstStyle/>
+          <a:p>
+            <a:pPr algn="r">
+              <a:lnSpc>
+                <a:spcPct val="110000"/>
+              </a:lnSpc>
+            </a:pPr>
+            <a:r>
+              <a:rPr sz="1000" b="1">
+                <a:solidFill>
+                  <a:srgbClr val="70757A"/>
+                </a:solidFill>
+                <a:latin typeface="Segoe UI"/>
+              </a:rPr>
+              <a:t>PG q-error</a:t>
+            </a:r>
+          </a:p>
+        </p:txBody>
+      </p:sp>
+      <p:sp>
+        <p:nvSpPr>
+          <p:cNvPr id="9" name="TextBox 8"/>
+          <p:cNvSpPr txBox="1"/>
+          <p:nvPr/>
+        </p:nvSpPr>
+        <p:spPr>
+          <a:xfrm>
+            <a:off x="6217920" y="1828800"/>
+            <a:ext cx="594360" cy="502920"/>
+          </a:xfrm>
+          <a:prstGeom prst="rect">
+            <a:avLst/>
+          </a:prstGeom>
+          <a:noFill/>
+        </p:spPr>
+        <p:txBody>
+          <a:bodyPr wrap="square" lIns="0" tIns="0" rIns="0" bIns="0" anchor="b">
+            <a:spAutoFit/>
+          </a:bodyPr>
+          <a:lstStyle/>
+          <a:p>
+            <a:pPr algn="r">
+              <a:lnSpc>
+                <a:spcPct val="110000"/>
+              </a:lnSpc>
+            </a:pPr>
+            <a:r>
+              <a:rPr sz="1000" b="1">
+                <a:solidFill>
+                  <a:srgbClr val="70757A"/>
+                </a:solidFill>
+                <a:latin typeface="Segoe UI"/>
+              </a:rPr>
+              <a:t>MDB n</a:t>
+            </a:r>
+          </a:p>
+        </p:txBody>
+      </p:sp>
+      <p:sp>
+        <p:nvSpPr>
+          <p:cNvPr id="10" name="TextBox 9"/>
+          <p:cNvSpPr txBox="1"/>
+          <p:nvPr/>
+        </p:nvSpPr>
+        <p:spPr>
+          <a:xfrm>
+            <a:off x="6995160" y="1828800"/>
+            <a:ext cx="1005840" cy="502920"/>
+          </a:xfrm>
+          <a:prstGeom prst="rect">
+            <a:avLst/>
+          </a:prstGeom>
+          <a:noFill/>
+        </p:spPr>
+        <p:txBody>
+          <a:bodyPr wrap="square" lIns="0" tIns="0" rIns="0" bIns="0" anchor="b">
+            <a:spAutoFit/>
+          </a:bodyPr>
+          <a:lstStyle/>
+          <a:p>
+            <a:pPr algn="r">
+              <a:lnSpc>
+                <a:spcPct val="110000"/>
+              </a:lnSpc>
+            </a:pPr>
+            <a:r>
+              <a:rPr sz="1000" b="1">
+                <a:solidFill>
+                  <a:srgbClr val="70757A"/>
+                </a:solidFill>
+                <a:latin typeface="Segoe UI"/>
+              </a:rPr>
+              <a:t>MDB wrong</a:t>
+            </a:r>
+          </a:p>
+        </p:txBody>
+      </p:sp>
+      <p:sp>
+        <p:nvSpPr>
+          <p:cNvPr id="11" name="TextBox 10"/>
+          <p:cNvSpPr txBox="1"/>
+          <p:nvPr/>
+        </p:nvSpPr>
+        <p:spPr>
+          <a:xfrm>
+            <a:off x="8183880" y="1828800"/>
+            <a:ext cx="1051560" cy="502920"/>
+          </a:xfrm>
+          <a:prstGeom prst="rect">
+            <a:avLst/>
+          </a:prstGeom>
+          <a:noFill/>
+        </p:spPr>
+        <p:txBody>
+          <a:bodyPr wrap="square" lIns="0" tIns="0" rIns="0" bIns="0" anchor="b">
+            <a:spAutoFit/>
+          </a:bodyPr>
+          <a:lstStyle/>
+          <a:p>
+            <a:pPr algn="r">
+              <a:lnSpc>
+                <a:spcPct val="110000"/>
+              </a:lnSpc>
+            </a:pPr>
+            <a:r>
+              <a:rPr sz="1000" b="1">
+                <a:solidFill>
+                  <a:srgbClr val="70757A"/>
+                </a:solidFill>
+                <a:latin typeface="Segoe UI"/>
+              </a:rPr>
+              <a:t>MDB median</a:t>
+            </a:r>
+          </a:p>
+        </p:txBody>
+      </p:sp>
+      <p:sp>
+        <p:nvSpPr>
+          <p:cNvPr id="12" name="TextBox 11"/>
+          <p:cNvSpPr txBox="1"/>
+          <p:nvPr/>
+        </p:nvSpPr>
+        <p:spPr>
+          <a:xfrm>
+            <a:off x="9418320" y="1828800"/>
+            <a:ext cx="1051560" cy="502920"/>
+          </a:xfrm>
+          <a:prstGeom prst="rect">
+            <a:avLst/>
+          </a:prstGeom>
+          <a:noFill/>
+        </p:spPr>
+        <p:txBody>
+          <a:bodyPr wrap="square" lIns="0" tIns="0" rIns="0" bIns="0" anchor="b">
+            <a:spAutoFit/>
+          </a:bodyPr>
+          <a:lstStyle/>
+          <a:p>
+            <a:pPr algn="r">
+              <a:lnSpc>
+                <a:spcPct val="110000"/>
+              </a:lnSpc>
+            </a:pPr>
+            <a:r>
+              <a:rPr sz="1000" b="1">
+                <a:solidFill>
+                  <a:srgbClr val="70757A"/>
+                </a:solidFill>
+                <a:latin typeface="Segoe UI"/>
+              </a:rPr>
+              <a:t>MDB q-error</a:t>
+            </a:r>
+          </a:p>
+        </p:txBody>
+      </p:sp>
+      <p:sp>
+        <p:nvSpPr>
+          <p:cNvPr id="13" name="Rectangle 12"/>
+          <p:cNvSpPr/>
+          <p:nvPr/>
+        </p:nvSpPr>
+        <p:spPr>
+          <a:xfrm>
+            <a:off x="822960" y="2331720"/>
+            <a:ext cx="9738360" cy="12700"/>
+          </a:xfrm>
+          <a:prstGeom prst="rect">
+            <a:avLst/>
+          </a:prstGeom>
+          <a:solidFill>
+            <a:srgbClr val="1A1D21"/>
+          </a:solidFill>
+          <a:ln>
+            <a:noFill/>
+          </a:ln>
+          <a:effectLst/>
+        </p:spPr>
+        <p:style>
+          <a:lnRef idx="1">
+            <a:schemeClr val="accent1"/>
+          </a:lnRef>
+          <a:fillRef idx="3">
+            <a:schemeClr val="accent1"/>
+          </a:fillRef>
+          <a:effectRef idx="2">
+            <a:schemeClr val="accent1"/>
+          </a:effectRef>
+          <a:fontRef idx="minor">
+            <a:schemeClr val="lt1"/>
+          </a:fontRef>
+        </p:style>
+        <p:txBody>
+          <a:bodyPr rtlCol="0" anchor="ctr"/>
+          <a:lstStyle/>
+          <a:p>
+            <a:pPr algn="ctr"/>
+            <a:endParaRPr/>
+          </a:p>
+        </p:txBody>
+      </p:sp>
+      <p:sp>
+        <p:nvSpPr>
+          <p:cNvPr id="14" name="TextBox 13"/>
+          <p:cNvSpPr txBox="1"/>
+          <p:nvPr/>
+        </p:nvSpPr>
+        <p:spPr>
+          <a:xfrm>
+            <a:off x="914400" y="2478024"/>
+            <a:ext cx="1051560" cy="310896"/>
+          </a:xfrm>
+          <a:prstGeom prst="rect">
+            <a:avLst/>
+          </a:prstGeom>
+          <a:noFill/>
+        </p:spPr>
+        <p:txBody>
+          <a:bodyPr wrap="square" lIns="0" tIns="0" rIns="0" bIns="0" anchor="t">
+            <a:spAutoFit/>
+          </a:bodyPr>
+          <a:lstStyle/>
+          <a:p>
+            <a:pPr algn="l">
+              <a:lnSpc>
+                <a:spcPct val="100000"/>
+              </a:lnSpc>
+            </a:pPr>
+            <a:r>
+              <a:rPr sz="1300" b="0">
+                <a:solidFill>
+                  <a:srgbClr val="1A1D21"/>
+                </a:solidFill>
+                <a:latin typeface="Segoe UI"/>
+              </a:rPr>
+              <a:t>conj</a:t>
+            </a:r>
+          </a:p>
+        </p:txBody>
+      </p:sp>
+      <p:sp>
+        <p:nvSpPr>
+          <p:cNvPr id="15" name="TextBox 14"/>
+          <p:cNvSpPr txBox="1"/>
+          <p:nvPr/>
+        </p:nvSpPr>
+        <p:spPr>
+          <a:xfrm>
+            <a:off x="2148840" y="2478024"/>
+            <a:ext cx="502920" cy="310896"/>
+          </a:xfrm>
+          <a:prstGeom prst="rect">
+            <a:avLst/>
+          </a:prstGeom>
+          <a:noFill/>
+        </p:spPr>
+        <p:txBody>
+          <a:bodyPr wrap="square" lIns="0" tIns="0" rIns="0" bIns="0" anchor="t">
+            <a:spAutoFit/>
+          </a:bodyPr>
+          <a:lstStyle/>
+          <a:p>
+            <a:pPr algn="r">
+              <a:lnSpc>
+                <a:spcPct val="100000"/>
+              </a:lnSpc>
+            </a:pPr>
+            <a:r>
+              <a:rPr sz="1300" b="0">
+                <a:solidFill>
+                  <a:srgbClr val="1A1D21"/>
+                </a:solidFill>
+                <a:latin typeface="Segoe UI"/>
+              </a:rPr>
+              <a:t>19</a:t>
+            </a:r>
+          </a:p>
+        </p:txBody>
+      </p:sp>
+      <p:sp>
+        <p:nvSpPr>
+          <p:cNvPr id="16" name="TextBox 15"/>
+          <p:cNvSpPr txBox="1"/>
+          <p:nvPr/>
+        </p:nvSpPr>
+        <p:spPr>
+          <a:xfrm>
+            <a:off x="2834640" y="2478024"/>
+            <a:ext cx="914400" cy="310896"/>
+          </a:xfrm>
+          <a:prstGeom prst="rect">
+            <a:avLst/>
+          </a:prstGeom>
+          <a:noFill/>
+        </p:spPr>
+        <p:txBody>
+          <a:bodyPr wrap="square" lIns="0" tIns="0" rIns="0" bIns="0" anchor="t">
+            <a:spAutoFit/>
+          </a:bodyPr>
+          <a:lstStyle/>
+          <a:p>
+            <a:pPr algn="r">
+              <a:lnSpc>
+                <a:spcPct val="100000"/>
+              </a:lnSpc>
+            </a:pPr>
+            <a:r>
+              <a:rPr sz="1300" b="0">
+                <a:solidFill>
+                  <a:srgbClr val="1A1D21"/>
+                </a:solidFill>
+                <a:latin typeface="Segoe UI"/>
+              </a:rPr>
+              <a:t>10.5%</a:t>
+            </a:r>
+          </a:p>
+        </p:txBody>
+      </p:sp>
+      <p:sp>
+        <p:nvSpPr>
+          <p:cNvPr id="17" name="TextBox 16"/>
+          <p:cNvSpPr txBox="1"/>
+          <p:nvPr/>
+        </p:nvSpPr>
+        <p:spPr>
+          <a:xfrm>
+            <a:off x="3931920" y="2478024"/>
+            <a:ext cx="960120" cy="310896"/>
+          </a:xfrm>
+          <a:prstGeom prst="rect">
+            <a:avLst/>
+          </a:prstGeom>
+          <a:noFill/>
+        </p:spPr>
+        <p:txBody>
+          <a:bodyPr wrap="square" lIns="0" tIns="0" rIns="0" bIns="0" anchor="t">
+            <a:spAutoFit/>
+          </a:bodyPr>
+          <a:lstStyle/>
+          <a:p>
+            <a:pPr algn="r">
+              <a:lnSpc>
+                <a:spcPct val="100000"/>
+              </a:lnSpc>
+            </a:pPr>
+            <a:r>
+              <a:rPr sz="1300" b="0">
+                <a:solidFill>
+                  <a:srgbClr val="1A1D21"/>
+                </a:solidFill>
+                <a:latin typeface="Segoe UI"/>
+              </a:rPr>
+              <a:t>1.044</a:t>
+            </a:r>
+          </a:p>
+        </p:txBody>
+      </p:sp>
+      <p:sp>
+        <p:nvSpPr>
+          <p:cNvPr id="18" name="TextBox 17"/>
+          <p:cNvSpPr txBox="1"/>
+          <p:nvPr/>
+        </p:nvSpPr>
+        <p:spPr>
+          <a:xfrm>
+            <a:off x="5074920" y="2478024"/>
+            <a:ext cx="960120" cy="310896"/>
+          </a:xfrm>
+          <a:prstGeom prst="rect">
+            <a:avLst/>
+          </a:prstGeom>
+          <a:noFill/>
+        </p:spPr>
+        <p:txBody>
+          <a:bodyPr wrap="square" lIns="0" tIns="0" rIns="0" bIns="0" anchor="t">
+            <a:spAutoFit/>
+          </a:bodyPr>
+          <a:lstStyle/>
+          <a:p>
+            <a:pPr algn="r">
+              <a:lnSpc>
+                <a:spcPct val="100000"/>
+              </a:lnSpc>
+            </a:pPr>
+            <a:r>
+              <a:rPr sz="1300" b="0">
+                <a:solidFill>
+                  <a:srgbClr val="1A1D21"/>
+                </a:solidFill>
+                <a:latin typeface="Segoe UI"/>
+              </a:rPr>
+              <a:t>71.3</a:t>
+            </a:r>
+          </a:p>
+        </p:txBody>
+      </p:sp>
+      <p:sp>
+        <p:nvSpPr>
+          <p:cNvPr id="19" name="TextBox 18"/>
+          <p:cNvSpPr txBox="1"/>
+          <p:nvPr/>
+        </p:nvSpPr>
+        <p:spPr>
+          <a:xfrm>
+            <a:off x="6217920" y="2478024"/>
+            <a:ext cx="594360" cy="310896"/>
+          </a:xfrm>
+          <a:prstGeom prst="rect">
+            <a:avLst/>
+          </a:prstGeom>
+          <a:noFill/>
+        </p:spPr>
+        <p:txBody>
+          <a:bodyPr wrap="square" lIns="0" tIns="0" rIns="0" bIns="0" anchor="t">
+            <a:spAutoFit/>
+          </a:bodyPr>
+          <a:lstStyle/>
+          <a:p>
+            <a:pPr algn="r">
+              <a:lnSpc>
+                <a:spcPct val="100000"/>
+              </a:lnSpc>
+            </a:pPr>
+            <a:r>
+              <a:rPr sz="1300" b="0">
+                <a:solidFill>
+                  <a:srgbClr val="1A1D21"/>
+                </a:solidFill>
+                <a:latin typeface="Segoe UI"/>
+              </a:rPr>
+              <a:t>20</a:t>
+            </a:r>
+          </a:p>
+        </p:txBody>
+      </p:sp>
+      <p:sp>
+        <p:nvSpPr>
+          <p:cNvPr id="20" name="TextBox 19"/>
+          <p:cNvSpPr txBox="1"/>
+          <p:nvPr/>
+        </p:nvSpPr>
+        <p:spPr>
+          <a:xfrm>
+            <a:off x="6995160" y="2478024"/>
+            <a:ext cx="1005840" cy="310896"/>
+          </a:xfrm>
+          <a:prstGeom prst="rect">
+            <a:avLst/>
+          </a:prstGeom>
+          <a:noFill/>
+        </p:spPr>
+        <p:txBody>
+          <a:bodyPr wrap="square" lIns="0" tIns="0" rIns="0" bIns="0" anchor="t">
+            <a:spAutoFit/>
+          </a:bodyPr>
+          <a:lstStyle/>
+          <a:p>
+            <a:pPr algn="r">
+              <a:lnSpc>
+                <a:spcPct val="100000"/>
+              </a:lnSpc>
+            </a:pPr>
+            <a:r>
+              <a:rPr sz="1300" b="0">
+                <a:solidFill>
+                  <a:srgbClr val="1A1D21"/>
+                </a:solidFill>
+                <a:latin typeface="Segoe UI"/>
+              </a:rPr>
+              <a:t>45.0%</a:t>
+            </a:r>
+          </a:p>
+        </p:txBody>
+      </p:sp>
+      <p:sp>
+        <p:nvSpPr>
+          <p:cNvPr id="21" name="TextBox 20"/>
+          <p:cNvSpPr txBox="1"/>
+          <p:nvPr/>
+        </p:nvSpPr>
+        <p:spPr>
+          <a:xfrm>
+            <a:off x="8183880" y="2478024"/>
+            <a:ext cx="1051560" cy="310896"/>
+          </a:xfrm>
+          <a:prstGeom prst="rect">
+            <a:avLst/>
+          </a:prstGeom>
+          <a:noFill/>
+        </p:spPr>
+        <p:txBody>
+          <a:bodyPr wrap="square" lIns="0" tIns="0" rIns="0" bIns="0" anchor="t">
+            <a:spAutoFit/>
+          </a:bodyPr>
+          <a:lstStyle/>
+          <a:p>
+            <a:pPr algn="r">
+              <a:lnSpc>
+                <a:spcPct val="100000"/>
+              </a:lnSpc>
+            </a:pPr>
+            <a:r>
+              <a:rPr sz="1300" b="0">
+                <a:solidFill>
+                  <a:srgbClr val="1A1D21"/>
+                </a:solidFill>
+                <a:latin typeface="Segoe UI"/>
+              </a:rPr>
+              <a:t>1.067</a:t>
+            </a:r>
+          </a:p>
+        </p:txBody>
+      </p:sp>
+      <p:sp>
+        <p:nvSpPr>
+          <p:cNvPr id="22" name="TextBox 21"/>
+          <p:cNvSpPr txBox="1"/>
+          <p:nvPr/>
+        </p:nvSpPr>
+        <p:spPr>
+          <a:xfrm>
+            <a:off x="9418320" y="2478024"/>
+            <a:ext cx="1051560" cy="310896"/>
+          </a:xfrm>
+          <a:prstGeom prst="rect">
+            <a:avLst/>
+          </a:prstGeom>
+          <a:noFill/>
+        </p:spPr>
+        <p:txBody>
+          <a:bodyPr wrap="square" lIns="0" tIns="0" rIns="0" bIns="0" anchor="t">
+            <a:spAutoFit/>
+          </a:bodyPr>
+          <a:lstStyle/>
+          <a:p>
+            <a:pPr algn="r">
+              <a:lnSpc>
+                <a:spcPct val="100000"/>
+              </a:lnSpc>
+            </a:pPr>
+            <a:r>
+              <a:rPr sz="1300" b="0">
+                <a:solidFill>
+                  <a:srgbClr val="1A1D21"/>
+                </a:solidFill>
+                <a:latin typeface="Segoe UI"/>
+              </a:rPr>
+              <a:t>1.00</a:t>
+            </a:r>
+          </a:p>
+        </p:txBody>
+      </p:sp>
+      <p:sp>
+        <p:nvSpPr>
+          <p:cNvPr id="23" name="Rectangle 22"/>
+          <p:cNvSpPr/>
+          <p:nvPr/>
+        </p:nvSpPr>
+        <p:spPr>
+          <a:xfrm>
+            <a:off x="822960" y="2788920"/>
+            <a:ext cx="9738360" cy="7620"/>
+          </a:xfrm>
+          <a:prstGeom prst="rect">
+            <a:avLst/>
+          </a:prstGeom>
+          <a:solidFill>
+            <a:srgbClr val="D9D5CF"/>
+          </a:solidFill>
+          <a:ln>
+            <a:noFill/>
+          </a:ln>
+          <a:effectLst/>
+        </p:spPr>
+        <p:style>
+          <a:lnRef idx="1">
+            <a:schemeClr val="accent1"/>
+          </a:lnRef>
+          <a:fillRef idx="3">
+            <a:schemeClr val="accent1"/>
+          </a:fillRef>
+          <a:effectRef idx="2">
+            <a:schemeClr val="accent1"/>
+          </a:effectRef>
+          <a:fontRef idx="minor">
+            <a:schemeClr val="lt1"/>
+          </a:fontRef>
+        </p:style>
+        <p:txBody>
+          <a:bodyPr rtlCol="0" anchor="ctr"/>
+          <a:lstStyle/>
+          <a:p>
+            <a:pPr algn="ctr"/>
+            <a:endParaRPr/>
+          </a:p>
+        </p:txBody>
+      </p:sp>
+      <p:sp>
+        <p:nvSpPr>
+          <p:cNvPr id="24" name="TextBox 23"/>
+          <p:cNvSpPr txBox="1"/>
+          <p:nvPr/>
+        </p:nvSpPr>
+        <p:spPr>
+          <a:xfrm>
+            <a:off x="914400" y="2880360"/>
+            <a:ext cx="1051560" cy="310896"/>
+          </a:xfrm>
+          <a:prstGeom prst="rect">
+            <a:avLst/>
+          </a:prstGeom>
+          <a:noFill/>
+        </p:spPr>
+        <p:txBody>
+          <a:bodyPr wrap="square" lIns="0" tIns="0" rIns="0" bIns="0" anchor="t">
+            <a:spAutoFit/>
+          </a:bodyPr>
+          <a:lstStyle/>
+          <a:p>
+            <a:pPr algn="l">
+              <a:lnSpc>
+                <a:spcPct val="100000"/>
+              </a:lnSpc>
+            </a:pPr>
+            <a:r>
+              <a:rPr sz="1300" b="1">
+                <a:solidFill>
+                  <a:srgbClr val="A8322A"/>
+                </a:solidFill>
+                <a:latin typeface="Segoe UI"/>
+              </a:rPr>
+              <a:t>eq</a:t>
+            </a:r>
+          </a:p>
+        </p:txBody>
+      </p:sp>
+      <p:sp>
+        <p:nvSpPr>
+          <p:cNvPr id="25" name="TextBox 24"/>
+          <p:cNvSpPr txBox="1"/>
+          <p:nvPr/>
+        </p:nvSpPr>
+        <p:spPr>
+          <a:xfrm>
+            <a:off x="2148840" y="2880360"/>
+            <a:ext cx="502920" cy="310896"/>
+          </a:xfrm>
+          <a:prstGeom prst="rect">
+            <a:avLst/>
+          </a:prstGeom>
+          <a:noFill/>
+        </p:spPr>
+        <p:txBody>
+          <a:bodyPr wrap="square" lIns="0" tIns="0" rIns="0" bIns="0" anchor="t">
+            <a:spAutoFit/>
+          </a:bodyPr>
+          <a:lstStyle/>
+          <a:p>
+            <a:pPr algn="r">
+              <a:lnSpc>
+                <a:spcPct val="100000"/>
+              </a:lnSpc>
+            </a:pPr>
+            <a:r>
+              <a:rPr sz="1300" b="1">
+                <a:solidFill>
+                  <a:srgbClr val="A8322A"/>
+                </a:solidFill>
+                <a:latin typeface="Segoe UI"/>
+              </a:rPr>
+              <a:t>3</a:t>
+            </a:r>
+          </a:p>
+        </p:txBody>
+      </p:sp>
+      <p:sp>
+        <p:nvSpPr>
+          <p:cNvPr id="26" name="TextBox 25"/>
+          <p:cNvSpPr txBox="1"/>
+          <p:nvPr/>
+        </p:nvSpPr>
+        <p:spPr>
+          <a:xfrm>
+            <a:off x="2834640" y="2880360"/>
+            <a:ext cx="914400" cy="310896"/>
+          </a:xfrm>
+          <a:prstGeom prst="rect">
+            <a:avLst/>
+          </a:prstGeom>
+          <a:noFill/>
+        </p:spPr>
+        <p:txBody>
+          <a:bodyPr wrap="square" lIns="0" tIns="0" rIns="0" bIns="0" anchor="t">
+            <a:spAutoFit/>
+          </a:bodyPr>
+          <a:lstStyle/>
+          <a:p>
+            <a:pPr algn="r">
+              <a:lnSpc>
+                <a:spcPct val="100000"/>
+              </a:lnSpc>
+            </a:pPr>
+            <a:r>
+              <a:rPr sz="1300" b="1">
+                <a:solidFill>
+                  <a:srgbClr val="A8322A"/>
+                </a:solidFill>
+                <a:latin typeface="Segoe UI"/>
+              </a:rPr>
+              <a:t>0.0%</a:t>
+            </a:r>
+          </a:p>
+        </p:txBody>
+      </p:sp>
+      <p:sp>
+        <p:nvSpPr>
+          <p:cNvPr id="27" name="TextBox 26"/>
+          <p:cNvSpPr txBox="1"/>
+          <p:nvPr/>
+        </p:nvSpPr>
+        <p:spPr>
+          <a:xfrm>
+            <a:off x="3931920" y="2880360"/>
+            <a:ext cx="960120" cy="310896"/>
+          </a:xfrm>
+          <a:prstGeom prst="rect">
+            <a:avLst/>
+          </a:prstGeom>
+          <a:noFill/>
+        </p:spPr>
+        <p:txBody>
+          <a:bodyPr wrap="square" lIns="0" tIns="0" rIns="0" bIns="0" anchor="t">
+            <a:spAutoFit/>
+          </a:bodyPr>
+          <a:lstStyle/>
+          <a:p>
+            <a:pPr algn="r">
+              <a:lnSpc>
+                <a:spcPct val="100000"/>
+              </a:lnSpc>
+            </a:pPr>
+            <a:r>
+              <a:rPr sz="1300" b="1">
+                <a:solidFill>
+                  <a:srgbClr val="A8322A"/>
+                </a:solidFill>
+                <a:latin typeface="Segoe UI"/>
+              </a:rPr>
+              <a:t>1.013</a:t>
+            </a:r>
+          </a:p>
+        </p:txBody>
+      </p:sp>
+      <p:sp>
+        <p:nvSpPr>
+          <p:cNvPr id="28" name="TextBox 27"/>
+          <p:cNvSpPr txBox="1"/>
+          <p:nvPr/>
+        </p:nvSpPr>
+        <p:spPr>
+          <a:xfrm>
+            <a:off x="5074920" y="2880360"/>
+            <a:ext cx="960120" cy="310896"/>
+          </a:xfrm>
+          <a:prstGeom prst="rect">
+            <a:avLst/>
+          </a:prstGeom>
+          <a:noFill/>
+        </p:spPr>
+        <p:txBody>
+          <a:bodyPr wrap="square" lIns="0" tIns="0" rIns="0" bIns="0" anchor="t">
+            <a:spAutoFit/>
+          </a:bodyPr>
+          <a:lstStyle/>
+          <a:p>
+            <a:pPr algn="r">
+              <a:lnSpc>
+                <a:spcPct val="100000"/>
+              </a:lnSpc>
+            </a:pPr>
+            <a:r>
+              <a:rPr sz="1300" b="1">
+                <a:solidFill>
+                  <a:srgbClr val="A8322A"/>
+                </a:solidFill>
+                <a:latin typeface="Segoe UI"/>
+              </a:rPr>
+              <a:t>1.00</a:t>
+            </a:r>
+          </a:p>
+        </p:txBody>
+      </p:sp>
+      <p:sp>
+        <p:nvSpPr>
+          <p:cNvPr id="29" name="TextBox 28"/>
+          <p:cNvSpPr txBox="1"/>
+          <p:nvPr/>
+        </p:nvSpPr>
+        <p:spPr>
+          <a:xfrm>
+            <a:off x="6217920" y="2880360"/>
+            <a:ext cx="594360" cy="310896"/>
+          </a:xfrm>
+          <a:prstGeom prst="rect">
+            <a:avLst/>
+          </a:prstGeom>
+          <a:noFill/>
+        </p:spPr>
+        <p:txBody>
+          <a:bodyPr wrap="square" lIns="0" tIns="0" rIns="0" bIns="0" anchor="t">
+            <a:spAutoFit/>
+          </a:bodyPr>
+          <a:lstStyle/>
+          <a:p>
+            <a:pPr algn="r">
+              <a:lnSpc>
+                <a:spcPct val="100000"/>
+              </a:lnSpc>
+            </a:pPr>
+            <a:r>
+              <a:rPr sz="1300" b="1">
+                <a:solidFill>
+                  <a:srgbClr val="A8322A"/>
+                </a:solidFill>
+                <a:latin typeface="Segoe UI"/>
+              </a:rPr>
+              <a:t>3</a:t>
+            </a:r>
+          </a:p>
+        </p:txBody>
+      </p:sp>
+      <p:sp>
+        <p:nvSpPr>
+          <p:cNvPr id="30" name="TextBox 29"/>
+          <p:cNvSpPr txBox="1"/>
+          <p:nvPr/>
+        </p:nvSpPr>
+        <p:spPr>
+          <a:xfrm>
+            <a:off x="6995160" y="2880360"/>
+            <a:ext cx="1005840" cy="310896"/>
+          </a:xfrm>
+          <a:prstGeom prst="rect">
+            <a:avLst/>
+          </a:prstGeom>
+          <a:noFill/>
+        </p:spPr>
+        <p:txBody>
+          <a:bodyPr wrap="square" lIns="0" tIns="0" rIns="0" bIns="0" anchor="t">
+            <a:spAutoFit/>
+          </a:bodyPr>
+          <a:lstStyle/>
+          <a:p>
+            <a:pPr algn="r">
+              <a:lnSpc>
+                <a:spcPct val="100000"/>
+              </a:lnSpc>
+            </a:pPr>
+            <a:r>
+              <a:rPr sz="1300" b="1">
+                <a:solidFill>
+                  <a:srgbClr val="A8322A"/>
+                </a:solidFill>
+                <a:latin typeface="Segoe UI"/>
+              </a:rPr>
+              <a:t>100.0%</a:t>
+            </a:r>
+          </a:p>
+        </p:txBody>
+      </p:sp>
+      <p:sp>
+        <p:nvSpPr>
+          <p:cNvPr id="31" name="TextBox 30"/>
+          <p:cNvSpPr txBox="1"/>
+          <p:nvPr/>
+        </p:nvSpPr>
+        <p:spPr>
+          <a:xfrm>
+            <a:off x="8183880" y="2880360"/>
+            <a:ext cx="1051560" cy="310896"/>
+          </a:xfrm>
+          <a:prstGeom prst="rect">
+            <a:avLst/>
+          </a:prstGeom>
+          <a:noFill/>
+        </p:spPr>
+        <p:txBody>
+          <a:bodyPr wrap="square" lIns="0" tIns="0" rIns="0" bIns="0" anchor="t">
+            <a:spAutoFit/>
+          </a:bodyPr>
+          <a:lstStyle/>
+          <a:p>
+            <a:pPr algn="r">
+              <a:lnSpc>
+                <a:spcPct val="100000"/>
+              </a:lnSpc>
+            </a:pPr>
+            <a:r>
+              <a:rPr sz="1300" b="1" dirty="0">
+                <a:solidFill>
+                  <a:srgbClr val="A8322A"/>
+                </a:solidFill>
+                <a:latin typeface="Segoe UI"/>
+              </a:rPr>
+              <a:t>6.837</a:t>
+            </a:r>
+          </a:p>
+        </p:txBody>
+      </p:sp>
+      <p:sp>
+        <p:nvSpPr>
+          <p:cNvPr id="32" name="TextBox 31"/>
+          <p:cNvSpPr txBox="1"/>
+          <p:nvPr/>
+        </p:nvSpPr>
+        <p:spPr>
+          <a:xfrm>
+            <a:off x="9418320" y="2880360"/>
+            <a:ext cx="1051560" cy="310896"/>
+          </a:xfrm>
+          <a:prstGeom prst="rect">
+            <a:avLst/>
+          </a:prstGeom>
+          <a:noFill/>
+        </p:spPr>
+        <p:txBody>
+          <a:bodyPr wrap="square" lIns="0" tIns="0" rIns="0" bIns="0" anchor="t">
+            <a:spAutoFit/>
+          </a:bodyPr>
+          <a:lstStyle/>
+          <a:p>
+            <a:pPr algn="r">
+              <a:lnSpc>
+                <a:spcPct val="100000"/>
+              </a:lnSpc>
+            </a:pPr>
+            <a:r>
+              <a:rPr sz="1300" b="1">
+                <a:solidFill>
+                  <a:srgbClr val="A8322A"/>
+                </a:solidFill>
+                <a:latin typeface="Segoe UI"/>
+              </a:rPr>
+              <a:t>1.29</a:t>
+            </a:r>
+          </a:p>
+        </p:txBody>
+      </p:sp>
+      <p:sp>
+        <p:nvSpPr>
+          <p:cNvPr id="33" name="Rectangle 32"/>
+          <p:cNvSpPr/>
+          <p:nvPr/>
+        </p:nvSpPr>
+        <p:spPr>
+          <a:xfrm>
+            <a:off x="822960" y="3191256"/>
+            <a:ext cx="9738360" cy="7620"/>
+          </a:xfrm>
+          <a:prstGeom prst="rect">
+            <a:avLst/>
+          </a:prstGeom>
+          <a:solidFill>
+            <a:srgbClr val="D9D5CF"/>
+          </a:solidFill>
+          <a:ln>
+            <a:noFill/>
+          </a:ln>
+          <a:effectLst/>
+        </p:spPr>
+        <p:style>
+          <a:lnRef idx="1">
+            <a:schemeClr val="accent1"/>
+          </a:lnRef>
+          <a:fillRef idx="3">
+            <a:schemeClr val="accent1"/>
+          </a:fillRef>
+          <a:effectRef idx="2">
+            <a:schemeClr val="accent1"/>
+          </a:effectRef>
+          <a:fontRef idx="minor">
+            <a:schemeClr val="lt1"/>
+          </a:fontRef>
+        </p:style>
+        <p:txBody>
+          <a:bodyPr rtlCol="0" anchor="ctr"/>
+          <a:lstStyle/>
+          <a:p>
+            <a:pPr algn="ctr"/>
+            <a:endParaRPr/>
+          </a:p>
+        </p:txBody>
+      </p:sp>
+      <p:sp>
+        <p:nvSpPr>
+          <p:cNvPr id="34" name="TextBox 33"/>
+          <p:cNvSpPr txBox="1"/>
+          <p:nvPr/>
+        </p:nvSpPr>
+        <p:spPr>
+          <a:xfrm>
+            <a:off x="914400" y="3282696"/>
+            <a:ext cx="1051560" cy="310896"/>
+          </a:xfrm>
+          <a:prstGeom prst="rect">
+            <a:avLst/>
+          </a:prstGeom>
+          <a:noFill/>
+        </p:spPr>
+        <p:txBody>
+          <a:bodyPr wrap="square" lIns="0" tIns="0" rIns="0" bIns="0" anchor="t">
+            <a:spAutoFit/>
+          </a:bodyPr>
+          <a:lstStyle/>
+          <a:p>
+            <a:pPr algn="l">
+              <a:lnSpc>
+                <a:spcPct val="100000"/>
+              </a:lnSpc>
+            </a:pPr>
+            <a:r>
+              <a:rPr sz="1300" b="0">
+                <a:solidFill>
+                  <a:srgbClr val="1A1D21"/>
+                </a:solidFill>
+                <a:latin typeface="Segoe UI"/>
+              </a:rPr>
+              <a:t>range</a:t>
+            </a:r>
+          </a:p>
+        </p:txBody>
+      </p:sp>
+      <p:sp>
+        <p:nvSpPr>
+          <p:cNvPr id="35" name="TextBox 34"/>
+          <p:cNvSpPr txBox="1"/>
+          <p:nvPr/>
+        </p:nvSpPr>
+        <p:spPr>
+          <a:xfrm>
+            <a:off x="2148840" y="3282696"/>
+            <a:ext cx="502920" cy="310896"/>
+          </a:xfrm>
+          <a:prstGeom prst="rect">
+            <a:avLst/>
+          </a:prstGeom>
+          <a:noFill/>
+        </p:spPr>
+        <p:txBody>
+          <a:bodyPr wrap="square" lIns="0" tIns="0" rIns="0" bIns="0" anchor="t">
+            <a:spAutoFit/>
+          </a:bodyPr>
+          <a:lstStyle/>
+          <a:p>
+            <a:pPr algn="r">
+              <a:lnSpc>
+                <a:spcPct val="100000"/>
+              </a:lnSpc>
+            </a:pPr>
+            <a:r>
+              <a:rPr sz="1300" b="0">
+                <a:solidFill>
+                  <a:srgbClr val="1A1D21"/>
+                </a:solidFill>
+                <a:latin typeface="Segoe UI"/>
+              </a:rPr>
+              <a:t>55</a:t>
+            </a:r>
+          </a:p>
+        </p:txBody>
+      </p:sp>
+      <p:sp>
+        <p:nvSpPr>
+          <p:cNvPr id="36" name="TextBox 35"/>
+          <p:cNvSpPr txBox="1"/>
+          <p:nvPr/>
+        </p:nvSpPr>
+        <p:spPr>
+          <a:xfrm>
+            <a:off x="2834640" y="3282696"/>
+            <a:ext cx="914400" cy="310896"/>
+          </a:xfrm>
+          <a:prstGeom prst="rect">
+            <a:avLst/>
+          </a:prstGeom>
+          <a:noFill/>
+        </p:spPr>
+        <p:txBody>
+          <a:bodyPr wrap="square" lIns="0" tIns="0" rIns="0" bIns="0" anchor="t">
+            <a:spAutoFit/>
+          </a:bodyPr>
+          <a:lstStyle/>
+          <a:p>
+            <a:pPr algn="r">
+              <a:lnSpc>
+                <a:spcPct val="100000"/>
+              </a:lnSpc>
+            </a:pPr>
+            <a:r>
+              <a:rPr sz="1300" b="0">
+                <a:solidFill>
+                  <a:srgbClr val="1A1D21"/>
+                </a:solidFill>
+                <a:latin typeface="Segoe UI"/>
+              </a:rPr>
+              <a:t>1.8%</a:t>
+            </a:r>
+          </a:p>
+        </p:txBody>
+      </p:sp>
+      <p:sp>
+        <p:nvSpPr>
+          <p:cNvPr id="37" name="TextBox 36"/>
+          <p:cNvSpPr txBox="1"/>
+          <p:nvPr/>
+        </p:nvSpPr>
+        <p:spPr>
+          <a:xfrm>
+            <a:off x="3931920" y="3282696"/>
+            <a:ext cx="960120" cy="310896"/>
+          </a:xfrm>
+          <a:prstGeom prst="rect">
+            <a:avLst/>
+          </a:prstGeom>
+          <a:noFill/>
+        </p:spPr>
+        <p:txBody>
+          <a:bodyPr wrap="square" lIns="0" tIns="0" rIns="0" bIns="0" anchor="t">
+            <a:spAutoFit/>
+          </a:bodyPr>
+          <a:lstStyle/>
+          <a:p>
+            <a:pPr algn="r">
+              <a:lnSpc>
+                <a:spcPct val="100000"/>
+              </a:lnSpc>
+            </a:pPr>
+            <a:r>
+              <a:rPr sz="1300" b="0">
+                <a:solidFill>
+                  <a:srgbClr val="1A1D21"/>
+                </a:solidFill>
+                <a:latin typeface="Segoe UI"/>
+              </a:rPr>
+              <a:t>1.013</a:t>
+            </a:r>
+          </a:p>
+        </p:txBody>
+      </p:sp>
+      <p:sp>
+        <p:nvSpPr>
+          <p:cNvPr id="38" name="TextBox 37"/>
+          <p:cNvSpPr txBox="1"/>
+          <p:nvPr/>
+        </p:nvSpPr>
+        <p:spPr>
+          <a:xfrm>
+            <a:off x="5074920" y="3282696"/>
+            <a:ext cx="960120" cy="310896"/>
+          </a:xfrm>
+          <a:prstGeom prst="rect">
+            <a:avLst/>
+          </a:prstGeom>
+          <a:noFill/>
+        </p:spPr>
+        <p:txBody>
+          <a:bodyPr wrap="square" lIns="0" tIns="0" rIns="0" bIns="0" anchor="t">
+            <a:spAutoFit/>
+          </a:bodyPr>
+          <a:lstStyle/>
+          <a:p>
+            <a:pPr algn="r">
+              <a:lnSpc>
+                <a:spcPct val="100000"/>
+              </a:lnSpc>
+            </a:pPr>
+            <a:r>
+              <a:rPr sz="1300" b="0">
+                <a:solidFill>
+                  <a:srgbClr val="1A1D21"/>
+                </a:solidFill>
+                <a:latin typeface="Segoe UI"/>
+              </a:rPr>
+              <a:t>1.01</a:t>
+            </a:r>
+          </a:p>
+        </p:txBody>
+      </p:sp>
+      <p:sp>
+        <p:nvSpPr>
+          <p:cNvPr id="39" name="TextBox 38"/>
+          <p:cNvSpPr txBox="1"/>
+          <p:nvPr/>
+        </p:nvSpPr>
+        <p:spPr>
+          <a:xfrm>
+            <a:off x="6217920" y="3282696"/>
+            <a:ext cx="594360" cy="310896"/>
+          </a:xfrm>
+          <a:prstGeom prst="rect">
+            <a:avLst/>
+          </a:prstGeom>
+          <a:noFill/>
+        </p:spPr>
+        <p:txBody>
+          <a:bodyPr wrap="square" lIns="0" tIns="0" rIns="0" bIns="0" anchor="t">
+            <a:spAutoFit/>
+          </a:bodyPr>
+          <a:lstStyle/>
+          <a:p>
+            <a:pPr algn="r">
+              <a:lnSpc>
+                <a:spcPct val="100000"/>
+              </a:lnSpc>
+            </a:pPr>
+            <a:r>
+              <a:rPr sz="1300" b="0">
+                <a:solidFill>
+                  <a:srgbClr val="1A1D21"/>
+                </a:solidFill>
+                <a:latin typeface="Segoe UI"/>
+              </a:rPr>
+              <a:t>66</a:t>
+            </a:r>
+          </a:p>
+        </p:txBody>
+      </p:sp>
+      <p:sp>
+        <p:nvSpPr>
+          <p:cNvPr id="40" name="TextBox 39"/>
+          <p:cNvSpPr txBox="1"/>
+          <p:nvPr/>
+        </p:nvSpPr>
+        <p:spPr>
+          <a:xfrm>
+            <a:off x="6995160" y="3282696"/>
+            <a:ext cx="1005840" cy="310896"/>
+          </a:xfrm>
+          <a:prstGeom prst="rect">
+            <a:avLst/>
+          </a:prstGeom>
+          <a:noFill/>
+        </p:spPr>
+        <p:txBody>
+          <a:bodyPr wrap="square" lIns="0" tIns="0" rIns="0" bIns="0" anchor="t">
+            <a:spAutoFit/>
+          </a:bodyPr>
+          <a:lstStyle/>
+          <a:p>
+            <a:pPr algn="r">
+              <a:lnSpc>
+                <a:spcPct val="100000"/>
+              </a:lnSpc>
+            </a:pPr>
+            <a:r>
+              <a:rPr sz="1300" b="0">
+                <a:solidFill>
+                  <a:srgbClr val="1A1D21"/>
+                </a:solidFill>
+                <a:latin typeface="Segoe UI"/>
+              </a:rPr>
+              <a:t>71.2%</a:t>
+            </a:r>
+          </a:p>
+        </p:txBody>
+      </p:sp>
+      <p:sp>
+        <p:nvSpPr>
+          <p:cNvPr id="41" name="TextBox 40"/>
+          <p:cNvSpPr txBox="1"/>
+          <p:nvPr/>
+        </p:nvSpPr>
+        <p:spPr>
+          <a:xfrm>
+            <a:off x="8183880" y="3282696"/>
+            <a:ext cx="1051560" cy="310896"/>
+          </a:xfrm>
+          <a:prstGeom prst="rect">
+            <a:avLst/>
+          </a:prstGeom>
+          <a:noFill/>
+        </p:spPr>
+        <p:txBody>
+          <a:bodyPr wrap="square" lIns="0" tIns="0" rIns="0" bIns="0" anchor="t">
+            <a:spAutoFit/>
+          </a:bodyPr>
+          <a:lstStyle/>
+          <a:p>
+            <a:pPr algn="r">
+              <a:lnSpc>
+                <a:spcPct val="100000"/>
+              </a:lnSpc>
+            </a:pPr>
+            <a:r>
+              <a:rPr sz="1300" b="0">
+                <a:solidFill>
+                  <a:srgbClr val="1A1D21"/>
+                </a:solidFill>
+                <a:latin typeface="Segoe UI"/>
+              </a:rPr>
+              <a:t>1.347</a:t>
+            </a:r>
+          </a:p>
+        </p:txBody>
+      </p:sp>
+      <p:sp>
+        <p:nvSpPr>
+          <p:cNvPr id="42" name="TextBox 41"/>
+          <p:cNvSpPr txBox="1"/>
+          <p:nvPr/>
+        </p:nvSpPr>
+        <p:spPr>
+          <a:xfrm>
+            <a:off x="9418320" y="3282696"/>
+            <a:ext cx="1051560" cy="310896"/>
+          </a:xfrm>
+          <a:prstGeom prst="rect">
+            <a:avLst/>
+          </a:prstGeom>
+          <a:noFill/>
+        </p:spPr>
+        <p:txBody>
+          <a:bodyPr wrap="square" lIns="0" tIns="0" rIns="0" bIns="0" anchor="t">
+            <a:spAutoFit/>
+          </a:bodyPr>
+          <a:lstStyle/>
+          <a:p>
+            <a:pPr algn="r">
+              <a:lnSpc>
+                <a:spcPct val="100000"/>
+              </a:lnSpc>
+            </a:pPr>
+            <a:r>
+              <a:rPr sz="1300" b="0">
+                <a:solidFill>
+                  <a:srgbClr val="1A1D21"/>
+                </a:solidFill>
+                <a:latin typeface="Segoe UI"/>
+              </a:rPr>
+              <a:t>1.84</a:t>
+            </a:r>
+          </a:p>
+        </p:txBody>
+      </p:sp>
+      <p:sp>
+        <p:nvSpPr>
+          <p:cNvPr id="43" name="Rectangle 42"/>
+          <p:cNvSpPr/>
+          <p:nvPr/>
+        </p:nvSpPr>
+        <p:spPr>
+          <a:xfrm>
+            <a:off x="822960" y="3593592"/>
+            <a:ext cx="9738360" cy="7620"/>
+          </a:xfrm>
+          <a:prstGeom prst="rect">
+            <a:avLst/>
+          </a:prstGeom>
+          <a:solidFill>
+            <a:srgbClr val="D9D5CF"/>
+          </a:solidFill>
+          <a:ln>
+            <a:noFill/>
+          </a:ln>
+          <a:effectLst/>
+        </p:spPr>
+        <p:style>
+          <a:lnRef idx="1">
+            <a:schemeClr val="accent1"/>
+          </a:lnRef>
+          <a:fillRef idx="3">
+            <a:schemeClr val="accent1"/>
+          </a:fillRef>
+          <a:effectRef idx="2">
+            <a:schemeClr val="accent1"/>
+          </a:effectRef>
+          <a:fontRef idx="minor">
+            <a:schemeClr val="lt1"/>
+          </a:fontRef>
+        </p:style>
+        <p:txBody>
+          <a:bodyPr rtlCol="0" anchor="ctr"/>
+          <a:lstStyle/>
+          <a:p>
+            <a:pPr algn="ctr"/>
+            <a:endParaRPr/>
+          </a:p>
+        </p:txBody>
+      </p:sp>
+      <p:sp>
+        <p:nvSpPr>
+          <p:cNvPr id="44" name="TextBox 43"/>
+          <p:cNvSpPr txBox="1"/>
+          <p:nvPr/>
+        </p:nvSpPr>
+        <p:spPr>
+          <a:xfrm>
+            <a:off x="914400" y="3685032"/>
+            <a:ext cx="1051560" cy="310896"/>
+          </a:xfrm>
+          <a:prstGeom prst="rect">
+            <a:avLst/>
+          </a:prstGeom>
+          <a:noFill/>
+        </p:spPr>
+        <p:txBody>
+          <a:bodyPr wrap="square" lIns="0" tIns="0" rIns="0" bIns="0" anchor="t">
+            <a:spAutoFit/>
+          </a:bodyPr>
+          <a:lstStyle/>
+          <a:p>
+            <a:pPr algn="l">
+              <a:lnSpc>
+                <a:spcPct val="100000"/>
+              </a:lnSpc>
+            </a:pPr>
+            <a:r>
+              <a:rPr sz="1300" b="0">
+                <a:solidFill>
+                  <a:srgbClr val="1A1D21"/>
+                </a:solidFill>
+                <a:latin typeface="Segoe UI"/>
+              </a:rPr>
+              <a:t>ts_range</a:t>
+            </a:r>
+          </a:p>
+        </p:txBody>
+      </p:sp>
+      <p:sp>
+        <p:nvSpPr>
+          <p:cNvPr id="45" name="TextBox 44"/>
+          <p:cNvSpPr txBox="1"/>
+          <p:nvPr/>
+        </p:nvSpPr>
+        <p:spPr>
+          <a:xfrm>
+            <a:off x="2148840" y="3685032"/>
+            <a:ext cx="502920" cy="310896"/>
+          </a:xfrm>
+          <a:prstGeom prst="rect">
+            <a:avLst/>
+          </a:prstGeom>
+          <a:noFill/>
+        </p:spPr>
+        <p:txBody>
+          <a:bodyPr wrap="square" lIns="0" tIns="0" rIns="0" bIns="0" anchor="t">
+            <a:spAutoFit/>
+          </a:bodyPr>
+          <a:lstStyle/>
+          <a:p>
+            <a:pPr algn="r">
+              <a:lnSpc>
+                <a:spcPct val="100000"/>
+              </a:lnSpc>
+            </a:pPr>
+            <a:r>
+              <a:rPr sz="1300" b="0">
+                <a:solidFill>
+                  <a:srgbClr val="1A1D21"/>
+                </a:solidFill>
+                <a:latin typeface="Segoe UI"/>
+              </a:rPr>
+              <a:t>53</a:t>
+            </a:r>
+          </a:p>
+        </p:txBody>
+      </p:sp>
+      <p:sp>
+        <p:nvSpPr>
+          <p:cNvPr id="46" name="TextBox 45"/>
+          <p:cNvSpPr txBox="1"/>
+          <p:nvPr/>
+        </p:nvSpPr>
+        <p:spPr>
+          <a:xfrm>
+            <a:off x="2834640" y="3685032"/>
+            <a:ext cx="914400" cy="310896"/>
+          </a:xfrm>
+          <a:prstGeom prst="rect">
+            <a:avLst/>
+          </a:prstGeom>
+          <a:noFill/>
+        </p:spPr>
+        <p:txBody>
+          <a:bodyPr wrap="square" lIns="0" tIns="0" rIns="0" bIns="0" anchor="t">
+            <a:spAutoFit/>
+          </a:bodyPr>
+          <a:lstStyle/>
+          <a:p>
+            <a:pPr algn="r">
+              <a:lnSpc>
+                <a:spcPct val="100000"/>
+              </a:lnSpc>
+            </a:pPr>
+            <a:r>
+              <a:rPr sz="1300" b="0">
+                <a:solidFill>
+                  <a:srgbClr val="1A1D21"/>
+                </a:solidFill>
+                <a:latin typeface="Segoe UI"/>
+              </a:rPr>
+              <a:t>0.0%</a:t>
+            </a:r>
+          </a:p>
+        </p:txBody>
+      </p:sp>
+      <p:sp>
+        <p:nvSpPr>
+          <p:cNvPr id="47" name="TextBox 46"/>
+          <p:cNvSpPr txBox="1"/>
+          <p:nvPr/>
+        </p:nvSpPr>
+        <p:spPr>
+          <a:xfrm>
+            <a:off x="3931920" y="3685032"/>
+            <a:ext cx="960120" cy="310896"/>
+          </a:xfrm>
+          <a:prstGeom prst="rect">
+            <a:avLst/>
+          </a:prstGeom>
+          <a:noFill/>
+        </p:spPr>
+        <p:txBody>
+          <a:bodyPr wrap="square" lIns="0" tIns="0" rIns="0" bIns="0" anchor="t">
+            <a:spAutoFit/>
+          </a:bodyPr>
+          <a:lstStyle/>
+          <a:p>
+            <a:pPr algn="r">
+              <a:lnSpc>
+                <a:spcPct val="100000"/>
+              </a:lnSpc>
+            </a:pPr>
+            <a:r>
+              <a:rPr sz="1300" b="0">
+                <a:solidFill>
+                  <a:srgbClr val="1A1D21"/>
+                </a:solidFill>
+                <a:latin typeface="Segoe UI"/>
+              </a:rPr>
+              <a:t>1.001</a:t>
+            </a:r>
+          </a:p>
+        </p:txBody>
+      </p:sp>
+      <p:sp>
+        <p:nvSpPr>
+          <p:cNvPr id="48" name="TextBox 47"/>
+          <p:cNvSpPr txBox="1"/>
+          <p:nvPr/>
+        </p:nvSpPr>
+        <p:spPr>
+          <a:xfrm>
+            <a:off x="5074920" y="3685032"/>
+            <a:ext cx="960120" cy="310896"/>
+          </a:xfrm>
+          <a:prstGeom prst="rect">
+            <a:avLst/>
+          </a:prstGeom>
+          <a:noFill/>
+        </p:spPr>
+        <p:txBody>
+          <a:bodyPr wrap="square" lIns="0" tIns="0" rIns="0" bIns="0" anchor="t">
+            <a:spAutoFit/>
+          </a:bodyPr>
+          <a:lstStyle/>
+          <a:p>
+            <a:pPr algn="r">
+              <a:lnSpc>
+                <a:spcPct val="100000"/>
+              </a:lnSpc>
+            </a:pPr>
+            <a:r>
+              <a:rPr sz="1300" b="0">
+                <a:solidFill>
+                  <a:srgbClr val="1A1D21"/>
+                </a:solidFill>
+                <a:latin typeface="Segoe UI"/>
+              </a:rPr>
+              <a:t>1.01</a:t>
+            </a:r>
+          </a:p>
+        </p:txBody>
+      </p:sp>
+      <p:sp>
+        <p:nvSpPr>
+          <p:cNvPr id="49" name="TextBox 48"/>
+          <p:cNvSpPr txBox="1"/>
+          <p:nvPr/>
+        </p:nvSpPr>
+        <p:spPr>
+          <a:xfrm>
+            <a:off x="6217920" y="3685032"/>
+            <a:ext cx="594360" cy="310896"/>
+          </a:xfrm>
+          <a:prstGeom prst="rect">
+            <a:avLst/>
+          </a:prstGeom>
+          <a:noFill/>
+        </p:spPr>
+        <p:txBody>
+          <a:bodyPr wrap="square" lIns="0" tIns="0" rIns="0" bIns="0" anchor="t">
+            <a:spAutoFit/>
+          </a:bodyPr>
+          <a:lstStyle/>
+          <a:p>
+            <a:pPr algn="r">
+              <a:lnSpc>
+                <a:spcPct val="100000"/>
+              </a:lnSpc>
+            </a:pPr>
+            <a:r>
+              <a:rPr sz="1300" b="0">
+                <a:solidFill>
+                  <a:srgbClr val="1A1D21"/>
+                </a:solidFill>
+                <a:latin typeface="Segoe UI"/>
+              </a:rPr>
+              <a:t>64</a:t>
+            </a:r>
+          </a:p>
+        </p:txBody>
+      </p:sp>
+      <p:sp>
+        <p:nvSpPr>
+          <p:cNvPr id="50" name="TextBox 49"/>
+          <p:cNvSpPr txBox="1"/>
+          <p:nvPr/>
+        </p:nvSpPr>
+        <p:spPr>
+          <a:xfrm>
+            <a:off x="6995160" y="3685032"/>
+            <a:ext cx="1005840" cy="310896"/>
+          </a:xfrm>
+          <a:prstGeom prst="rect">
+            <a:avLst/>
+          </a:prstGeom>
+          <a:noFill/>
+        </p:spPr>
+        <p:txBody>
+          <a:bodyPr wrap="square" lIns="0" tIns="0" rIns="0" bIns="0" anchor="t">
+            <a:spAutoFit/>
+          </a:bodyPr>
+          <a:lstStyle/>
+          <a:p>
+            <a:pPr algn="r">
+              <a:lnSpc>
+                <a:spcPct val="100000"/>
+              </a:lnSpc>
+            </a:pPr>
+            <a:r>
+              <a:rPr sz="1300" b="0">
+                <a:solidFill>
+                  <a:srgbClr val="1A1D21"/>
+                </a:solidFill>
+                <a:latin typeface="Segoe UI"/>
+              </a:rPr>
+              <a:t>65.6%</a:t>
+            </a:r>
+          </a:p>
+        </p:txBody>
+      </p:sp>
+      <p:sp>
+        <p:nvSpPr>
+          <p:cNvPr id="51" name="TextBox 50"/>
+          <p:cNvSpPr txBox="1"/>
+          <p:nvPr/>
+        </p:nvSpPr>
+        <p:spPr>
+          <a:xfrm>
+            <a:off x="8183880" y="3685032"/>
+            <a:ext cx="1051560" cy="310896"/>
+          </a:xfrm>
+          <a:prstGeom prst="rect">
+            <a:avLst/>
+          </a:prstGeom>
+          <a:noFill/>
+        </p:spPr>
+        <p:txBody>
+          <a:bodyPr wrap="square" lIns="0" tIns="0" rIns="0" bIns="0" anchor="t">
+            <a:spAutoFit/>
+          </a:bodyPr>
+          <a:lstStyle/>
+          <a:p>
+            <a:pPr algn="r">
+              <a:lnSpc>
+                <a:spcPct val="100000"/>
+              </a:lnSpc>
+            </a:pPr>
+            <a:r>
+              <a:rPr sz="1300" b="0">
+                <a:solidFill>
+                  <a:srgbClr val="1A1D21"/>
+                </a:solidFill>
+                <a:latin typeface="Segoe UI"/>
+              </a:rPr>
+              <a:t>1.343</a:t>
+            </a:r>
+          </a:p>
+        </p:txBody>
+      </p:sp>
+      <p:sp>
+        <p:nvSpPr>
+          <p:cNvPr id="52" name="TextBox 51"/>
+          <p:cNvSpPr txBox="1"/>
+          <p:nvPr/>
+        </p:nvSpPr>
+        <p:spPr>
+          <a:xfrm>
+            <a:off x="9418320" y="3685032"/>
+            <a:ext cx="1051560" cy="310896"/>
+          </a:xfrm>
+          <a:prstGeom prst="rect">
+            <a:avLst/>
+          </a:prstGeom>
+          <a:noFill/>
+        </p:spPr>
+        <p:txBody>
+          <a:bodyPr wrap="square" lIns="0" tIns="0" rIns="0" bIns="0" anchor="t">
+            <a:spAutoFit/>
+          </a:bodyPr>
+          <a:lstStyle/>
+          <a:p>
+            <a:pPr algn="r">
+              <a:lnSpc>
+                <a:spcPct val="100000"/>
+              </a:lnSpc>
+            </a:pPr>
+            <a:r>
+              <a:rPr sz="1300" b="0">
+                <a:solidFill>
+                  <a:srgbClr val="1A1D21"/>
+                </a:solidFill>
+                <a:latin typeface="Segoe UI"/>
+              </a:rPr>
+              <a:t>1.97</a:t>
+            </a:r>
+          </a:p>
+        </p:txBody>
+      </p:sp>
+      <p:sp>
+        <p:nvSpPr>
+          <p:cNvPr id="53" name="Rectangle 52"/>
+          <p:cNvSpPr/>
+          <p:nvPr/>
+        </p:nvSpPr>
+        <p:spPr>
+          <a:xfrm>
+            <a:off x="822960" y="4014216"/>
+            <a:ext cx="9738360" cy="12700"/>
+          </a:xfrm>
+          <a:prstGeom prst="rect">
+            <a:avLst/>
+          </a:prstGeom>
+          <a:solidFill>
+            <a:srgbClr val="1A1D21"/>
+          </a:solidFill>
+          <a:ln>
+            <a:noFill/>
+          </a:ln>
+          <a:effectLst/>
+        </p:spPr>
+        <p:style>
+          <a:lnRef idx="1">
+            <a:schemeClr val="accent1"/>
+          </a:lnRef>
+          <a:fillRef idx="3">
+            <a:schemeClr val="accent1"/>
+          </a:fillRef>
+          <a:effectRef idx="2">
+            <a:schemeClr val="accent1"/>
+          </a:effectRef>
+          <a:fontRef idx="minor">
+            <a:schemeClr val="lt1"/>
+          </a:fontRef>
+        </p:style>
+        <p:txBody>
+          <a:bodyPr rtlCol="0" anchor="ctr"/>
+          <a:lstStyle/>
+          <a:p>
+            <a:pPr algn="ctr"/>
+            <a:endParaRPr/>
+          </a:p>
+        </p:txBody>
+      </p:sp>
+      <p:sp>
+        <p:nvSpPr>
+          <p:cNvPr id="54" name="Rectangle 53"/>
+          <p:cNvSpPr/>
+          <p:nvPr/>
+        </p:nvSpPr>
+        <p:spPr>
+          <a:xfrm>
+            <a:off x="822960" y="4114800"/>
+            <a:ext cx="10545775" cy="9525"/>
+          </a:xfrm>
+          <a:prstGeom prst="rect">
+            <a:avLst/>
+          </a:prstGeom>
+          <a:solidFill>
+            <a:srgbClr val="D9D5CF"/>
+          </a:solidFill>
+          <a:ln>
+            <a:noFill/>
+          </a:ln>
+          <a:effectLst/>
+        </p:spPr>
+        <p:style>
+          <a:lnRef idx="1">
+            <a:schemeClr val="accent1"/>
+          </a:lnRef>
+          <a:fillRef idx="3">
+            <a:schemeClr val="accent1"/>
+          </a:fillRef>
+          <a:effectRef idx="2">
+            <a:schemeClr val="accent1"/>
+          </a:effectRef>
+          <a:fontRef idx="minor">
+            <a:schemeClr val="lt1"/>
+          </a:fontRef>
+        </p:style>
+        <p:txBody>
+          <a:bodyPr rtlCol="0" anchor="ctr"/>
+          <a:lstStyle/>
+          <a:p>
+            <a:pPr algn="ctr"/>
+            <a:endParaRPr/>
+          </a:p>
+        </p:txBody>
+      </p:sp>
+      <p:sp>
+        <p:nvSpPr>
+          <p:cNvPr id="55" name="TextBox 54"/>
+          <p:cNvSpPr txBox="1"/>
+          <p:nvPr/>
+        </p:nvSpPr>
+        <p:spPr>
+          <a:xfrm>
+            <a:off x="822960" y="4434840"/>
+            <a:ext cx="5394960" cy="1737360"/>
+          </a:xfrm>
+          <a:prstGeom prst="rect">
+            <a:avLst/>
+          </a:prstGeom>
+          <a:noFill/>
+        </p:spPr>
+        <p:txBody>
+          <a:bodyPr wrap="square" lIns="0" tIns="0" rIns="0" bIns="0" anchor="t">
+            <a:spAutoFit/>
+          </a:bodyPr>
+          <a:lstStyle/>
+          <a:p>
+            <a:pPr algn="l">
+              <a:lnSpc>
+                <a:spcPct val="135000"/>
+              </a:lnSpc>
+            </a:pPr>
+            <a:r>
+              <a:rPr sz="1400" b="1">
+                <a:solidFill>
+                  <a:srgbClr val="1F4E5F"/>
+                </a:solidFill>
+                <a:latin typeface="Segoe UI"/>
+              </a:rPr>
+              <a:t>PostgreSQL</a:t>
+            </a:r>
+            <a:r>
+              <a:rPr sz="1450" b="0">
+                <a:solidFill>
+                  <a:srgbClr val="1A1D21"/>
+                </a:solidFill>
+                <a:latin typeface="Segoe UI"/>
+              </a:rPr>
+              <a:t>  errs almost only on conjunctions, and that is exactly where its estimation error is worst, 71.3. Here the textbook story holds.</a:t>
+            </a:r>
+          </a:p>
+        </p:txBody>
+      </p:sp>
+      <p:sp>
+        <p:nvSpPr>
+          <p:cNvPr id="56" name="TextBox 55"/>
+          <p:cNvSpPr txBox="1"/>
+          <p:nvPr/>
+        </p:nvSpPr>
+        <p:spPr>
+          <a:xfrm>
+            <a:off x="6583680" y="4434840"/>
+            <a:ext cx="4754880" cy="1737360"/>
+          </a:xfrm>
+          <a:prstGeom prst="rect">
+            <a:avLst/>
+          </a:prstGeom>
+          <a:noFill/>
+        </p:spPr>
+        <p:txBody>
+          <a:bodyPr wrap="square" lIns="0" tIns="0" rIns="0" bIns="0" anchor="t">
+            <a:spAutoFit/>
+          </a:bodyPr>
+          <a:lstStyle/>
+          <a:p>
+            <a:pPr algn="l">
+              <a:lnSpc>
+                <a:spcPct val="135000"/>
+              </a:lnSpc>
+            </a:pPr>
+            <a:r>
+              <a:rPr sz="1400" b="1">
+                <a:solidFill>
+                  <a:srgbClr val="A8322A"/>
+                </a:solidFill>
+                <a:latin typeface="Segoe UI"/>
+              </a:rPr>
+              <a:t>MariaDB</a:t>
+            </a:r>
+            <a:r>
+              <a:rPr sz="1450" b="0">
+                <a:solidFill>
+                  <a:srgbClr val="1A1D21"/>
+                </a:solidFill>
+                <a:latin typeface="Segoe UI"/>
+              </a:rPr>
+              <a:t>  estimates conjunctions perfectly at 1.00 and still errs on 45% of them. On equality it is wrong every time, by a median of 6.8x, with a near-correct estimate.</a:t>
+            </a:r>
+          </a:p>
+        </p:txBody>
+      </p:sp>
+      <p:sp>
+        <p:nvSpPr>
+          <p:cNvPr id="57" name="TextBox 56"/>
+          <p:cNvSpPr txBox="1"/>
+          <p:nvPr/>
+        </p:nvSpPr>
+        <p:spPr>
+          <a:xfrm>
+            <a:off x="10728655" y="6327648"/>
+            <a:ext cx="640080" cy="274320"/>
+          </a:xfrm>
+          <a:prstGeom prst="rect">
+            <a:avLst/>
+          </a:prstGeom>
+          <a:noFill/>
+        </p:spPr>
+        <p:txBody>
+          <a:bodyPr wrap="square" lIns="0" tIns="0" rIns="0" bIns="0" anchor="t">
+            <a:spAutoFit/>
+          </a:bodyPr>
+          <a:lstStyle/>
+          <a:p>
+            <a:pPr algn="r">
+              <a:lnSpc>
+                <a:spcPct val="100000"/>
+              </a:lnSpc>
+            </a:pPr>
+            <a:r>
+              <a:rPr sz="1000" b="0">
+                <a:solidFill>
+                  <a:srgbClr val="A8ACB0"/>
+                </a:solidFill>
+                <a:latin typeface="Segoe UI"/>
+              </a:rPr>
+              <a:t>7</a:t>
+            </a:r>
+          </a:p>
+        </p:txBody>
+      </p:sp>
+    </p:spTree>
+  </p:cSld>
+  <p:clrMapOvr>
+    <a:masterClrMapping/>
+  </p:clrMapOvr>
+</p:sld>
+</file>
+
+<file path=ppt/slides/slide8.xml><?xml version="1.0" encoding="utf-8"?>
+<p:sld xmlns:a="http://schemas.openxmlformats.org/drawingml/2006/main" xmlns:r="http://schemas.openxmlformats.org/officeDocument/2006/relationships" xmlns:p="http://schemas.openxmlformats.org/presentationml/2006/main">
   <p:cSld>
     <p:bg>
       <p:bgPr>
@@ -11418,7 +14208,14 @@
         <p:cNvGrpSpPr/>
         <p:nvPr/>
       </p:nvGrpSpPr>
-      <p:grpSpPr/>
+      <p:grpSpPr>
+        <a:xfrm>
+          <a:off x="0" y="0"/>
+          <a:ext cx="0" cy="0"/>
+          <a:chOff x="0" y="0"/>
+          <a:chExt cx="0" cy="0"/>
+        </a:xfrm>
+      </p:grpSpPr>
       <p:sp>
         <p:nvSpPr>
           <p:cNvPr id="2" name="TextBox 1"/>
@@ -11436,7 +14233,7 @@
           <a:noFill/>
         </p:spPr>
         <p:txBody>
-          <a:bodyPr wrap="square" anchor="t" lIns="0" rIns="0" tIns="0" bIns="0">
+          <a:bodyPr wrap="square" lIns="0" tIns="0" rIns="0" bIns="0" anchor="t">
             <a:spAutoFit/>
           </a:bodyPr>
           <a:lstStyle/>
@@ -11475,7 +14272,7 @@
           <a:noFill/>
         </p:spPr>
         <p:txBody>
-          <a:bodyPr wrap="square" anchor="t" lIns="0" rIns="0" tIns="0" bIns="0">
+          <a:bodyPr wrap="square" lIns="0" tIns="0" rIns="0" bIns="0" anchor="t">
             <a:spAutoFit/>
           </a:bodyPr>
           <a:lstStyle/>
@@ -11514,7 +14311,7 @@
           <a:noFill/>
         </p:spPr>
         <p:txBody>
-          <a:bodyPr wrap="square" anchor="b" lIns="0" rIns="0" tIns="0" bIns="0">
+          <a:bodyPr wrap="square" lIns="0" tIns="0" rIns="0" bIns="0" anchor="b">
             <a:spAutoFit/>
           </a:bodyPr>
           <a:lstStyle/>
@@ -11553,7 +14350,7 @@
           <a:noFill/>
         </p:spPr>
         <p:txBody>
-          <a:bodyPr wrap="square" anchor="b" lIns="0" rIns="0" tIns="0" bIns="0">
+          <a:bodyPr wrap="square" lIns="0" tIns="0" rIns="0" bIns="0" anchor="b">
             <a:spAutoFit/>
           </a:bodyPr>
           <a:lstStyle/>
@@ -11592,7 +14389,7 @@
           <a:noFill/>
         </p:spPr>
         <p:txBody>
-          <a:bodyPr wrap="square" anchor="b" lIns="0" rIns="0" tIns="0" bIns="0">
+          <a:bodyPr wrap="square" lIns="0" tIns="0" rIns="0" bIns="0" anchor="b">
             <a:spAutoFit/>
           </a:bodyPr>
           <a:lstStyle/>
@@ -11655,6 +14452,7 @@
           <a:lstStyle/>
           <a:p>
             <a:pPr algn="ctr"/>
+            <a:endParaRPr/>
           </a:p>
         </p:txBody>
       </p:sp>
@@ -11675,7 +14473,7 @@
           <a:noFill/>
         </p:spPr>
         <p:txBody>
-          <a:bodyPr wrap="square" anchor="t" lIns="0" rIns="0" tIns="0" bIns="0">
+          <a:bodyPr wrap="square" lIns="0" tIns="0" rIns="0" bIns="0" anchor="t">
             <a:spAutoFit/>
           </a:bodyPr>
           <a:lstStyle/>
@@ -11714,7 +14512,7 @@
           <a:noFill/>
         </p:spPr>
         <p:txBody>
-          <a:bodyPr wrap="square" anchor="t" lIns="0" rIns="0" tIns="0" bIns="0">
+          <a:bodyPr wrap="square" lIns="0" tIns="0" rIns="0" bIns="0" anchor="t">
             <a:spAutoFit/>
           </a:bodyPr>
           <a:lstStyle/>
@@ -11753,7 +14551,7 @@
           <a:noFill/>
         </p:spPr>
         <p:txBody>
-          <a:bodyPr wrap="square" anchor="t" lIns="0" rIns="0" tIns="0" bIns="0">
+          <a:bodyPr wrap="square" lIns="0" tIns="0" rIns="0" bIns="0" anchor="t">
             <a:spAutoFit/>
           </a:bodyPr>
           <a:lstStyle/>
@@ -11816,6 +14614,7 @@
           <a:lstStyle/>
           <a:p>
             <a:pPr algn="ctr"/>
+            <a:endParaRPr/>
           </a:p>
         </p:txBody>
       </p:sp>
@@ -11836,7 +14635,7 @@
           <a:noFill/>
         </p:spPr>
         <p:txBody>
-          <a:bodyPr wrap="square" anchor="t" lIns="0" rIns="0" tIns="0" bIns="0">
+          <a:bodyPr wrap="square" lIns="0" tIns="0" rIns="0" bIns="0" anchor="t">
             <a:spAutoFit/>
           </a:bodyPr>
           <a:lstStyle/>
@@ -11875,7 +14674,7 @@
           <a:noFill/>
         </p:spPr>
         <p:txBody>
-          <a:bodyPr wrap="square" anchor="t" lIns="0" rIns="0" tIns="0" bIns="0">
+          <a:bodyPr wrap="square" lIns="0" tIns="0" rIns="0" bIns="0" anchor="t">
             <a:spAutoFit/>
           </a:bodyPr>
           <a:lstStyle/>
@@ -11914,7 +14713,7 @@
           <a:noFill/>
         </p:spPr>
         <p:txBody>
-          <a:bodyPr wrap="square" anchor="t" lIns="0" rIns="0" tIns="0" bIns="0">
+          <a:bodyPr wrap="square" lIns="0" tIns="0" rIns="0" bIns="0" anchor="t">
             <a:spAutoFit/>
           </a:bodyPr>
           <a:lstStyle/>
@@ -11977,6 +14776,7 @@
           <a:lstStyle/>
           <a:p>
             <a:pPr algn="ctr"/>
+            <a:endParaRPr/>
           </a:p>
         </p:txBody>
       </p:sp>
@@ -11997,7 +14797,7 @@
           <a:noFill/>
         </p:spPr>
         <p:txBody>
-          <a:bodyPr wrap="square" anchor="t" lIns="0" rIns="0" tIns="0" bIns="0">
+          <a:bodyPr wrap="square" lIns="0" tIns="0" rIns="0" bIns="0" anchor="t">
             <a:spAutoFit/>
           </a:bodyPr>
           <a:lstStyle/>
@@ -12036,7 +14836,7 @@
           <a:noFill/>
         </p:spPr>
         <p:txBody>
-          <a:bodyPr wrap="square" anchor="t" lIns="0" rIns="0" tIns="0" bIns="0">
+          <a:bodyPr wrap="square" lIns="0" tIns="0" rIns="0" bIns="0" anchor="t">
             <a:spAutoFit/>
           </a:bodyPr>
           <a:lstStyle/>
@@ -12075,7 +14875,7 @@
           <a:noFill/>
         </p:spPr>
         <p:txBody>
-          <a:bodyPr wrap="square" anchor="t" lIns="0" rIns="0" tIns="0" bIns="0">
+          <a:bodyPr wrap="square" lIns="0" tIns="0" rIns="0" bIns="0" anchor="t">
             <a:spAutoFit/>
           </a:bodyPr>
           <a:lstStyle/>
@@ -12138,6 +14938,7 @@
           <a:lstStyle/>
           <a:p>
             <a:pPr algn="ctr"/>
+            <a:endParaRPr/>
           </a:p>
         </p:txBody>
       </p:sp>
@@ -12182,6 +14983,7 @@
           <a:lstStyle/>
           <a:p>
             <a:pPr algn="ctr"/>
+            <a:endParaRPr/>
           </a:p>
         </p:txBody>
       </p:sp>
@@ -12202,7 +15004,7 @@
           <a:noFill/>
         </p:spPr>
         <p:txBody>
-          <a:bodyPr wrap="square" anchor="t" lIns="0" rIns="0" tIns="0" bIns="0">
+          <a:bodyPr wrap="square" lIns="0" tIns="0" rIns="0" bIns="0" anchor="t">
             <a:spAutoFit/>
           </a:bodyPr>
           <a:lstStyle/>
@@ -12213,7 +15015,7 @@
               </a:lnSpc>
             </a:pPr>
             <a:r>
-              <a:rPr sz="1650" b="0">
+              <a:rPr sz="1650" b="0" dirty="0">
                 <a:solidFill>
                   <a:srgbClr val="1A1D21"/>
                 </a:solidFill>
@@ -12228,15 +15030,12 @@
                 <a:spcPct val="135000"/>
               </a:lnSpc>
             </a:pPr>
-            <a:r>
-              <a:rPr sz="800" b="0">
-                <a:solidFill>
-                  <a:srgbClr val="1A1D21"/>
-                </a:solidFill>
-                <a:latin typeface="Segoe UI"/>
-              </a:rPr>
-              <a:t/>
-            </a:r>
+            <a:endParaRPr sz="1650" b="0" dirty="0">
+              <a:solidFill>
+                <a:srgbClr val="1A1D21"/>
+              </a:solidFill>
+              <a:latin typeface="Segoe UI"/>
+            </a:endParaRPr>
           </a:p>
           <a:p>
             <a:pPr algn="l">
@@ -12245,7 +15044,7 @@
               </a:lnSpc>
             </a:pPr>
             <a:r>
-              <a:rPr sz="1650" b="1">
+              <a:rPr sz="1650" b="1" dirty="0">
                 <a:solidFill>
                   <a:srgbClr val="A8322A"/>
                 </a:solidFill>
@@ -12273,7 +15072,7 @@
           <a:noFill/>
         </p:spPr>
         <p:txBody>
-          <a:bodyPr wrap="square" anchor="t" lIns="0" rIns="0" tIns="0" bIns="0">
+          <a:bodyPr wrap="square" lIns="0" tIns="0" rIns="0" bIns="0" anchor="t">
             <a:spAutoFit/>
           </a:bodyPr>
           <a:lstStyle/>
@@ -12284,7 +15083,7 @@
               </a:lnSpc>
             </a:pPr>
             <a:r>
-              <a:rPr sz="1500" b="0">
+              <a:rPr sz="1500" b="0" dirty="0">
                 <a:solidFill>
                   <a:srgbClr val="70757A"/>
                 </a:solidFill>
@@ -12300,7 +15099,7 @@
               </a:lnSpc>
             </a:pPr>
             <a:r>
-              <a:rPr sz="1500" b="0">
+              <a:rPr sz="1500" b="0" dirty="0">
                 <a:solidFill>
                   <a:srgbClr val="70757A"/>
                 </a:solidFill>
@@ -12316,7 +15115,7 @@
               </a:lnSpc>
             </a:pPr>
             <a:r>
-              <a:rPr sz="1500" b="0">
+              <a:rPr sz="1500" b="0" dirty="0">
                 <a:solidFill>
                   <a:srgbClr val="70757A"/>
                 </a:solidFill>
@@ -12332,7 +15131,7 @@
               </a:lnSpc>
             </a:pPr>
             <a:r>
-              <a:rPr sz="1500" b="0">
+              <a:rPr sz="1500" b="0" dirty="0">
                 <a:solidFill>
                   <a:srgbClr val="70757A"/>
                 </a:solidFill>
@@ -12348,7 +15147,7 @@
               </a:lnSpc>
             </a:pPr>
             <a:r>
-              <a:rPr sz="1500" b="0">
+              <a:rPr sz="1500" b="0" dirty="0">
                 <a:solidFill>
                   <a:srgbClr val="70757A"/>
                 </a:solidFill>
@@ -12376,7 +15175,7 @@
           <a:noFill/>
         </p:spPr>
         <p:txBody>
-          <a:bodyPr wrap="square" anchor="t" lIns="0" rIns="0" tIns="0" bIns="0">
+          <a:bodyPr wrap="square" lIns="0" tIns="0" rIns="0" bIns="0" anchor="t">
             <a:spAutoFit/>
           </a:bodyPr>
           <a:lstStyle/>
@@ -12415,7 +15214,7 @@
           <a:noFill/>
         </p:spPr>
         <p:txBody>
-          <a:bodyPr wrap="square" anchor="t" lIns="0" rIns="0" tIns="0" bIns="0">
+          <a:bodyPr wrap="square" lIns="0" tIns="0" rIns="0" bIns="0" anchor="t">
             <a:spAutoFit/>
           </a:bodyPr>
           <a:lstStyle/>
@@ -12445,8 +15244,8 @@
 </p:sld>
 </file>
 
-<file path=ppt/slides/slide8.xml><?xml version="1.0" encoding="utf-8"?>
-<p:sld xmlns:a="http://schemas.openxmlformats.org/drawingml/2006/main" xmlns:p="http://schemas.openxmlformats.org/presentationml/2006/main" xmlns:r="http://schemas.openxmlformats.org/officeDocument/2006/relationships">
+<file path=ppt/slides/slide9.xml><?xml version="1.0" encoding="utf-8"?>
+<p:sld xmlns:a="http://schemas.openxmlformats.org/drawingml/2006/main" xmlns:r="http://schemas.openxmlformats.org/officeDocument/2006/relationships" xmlns:p="http://schemas.openxmlformats.org/presentationml/2006/main">
   <p:cSld>
     <p:bg>
       <p:bgPr>
@@ -12462,7 +15261,14 @@
         <p:cNvGrpSpPr/>
         <p:nvPr/>
       </p:nvGrpSpPr>
-      <p:grpSpPr/>
+      <p:grpSpPr>
+        <a:xfrm>
+          <a:off x="0" y="0"/>
+          <a:ext cx="0" cy="0"/>
+          <a:chOff x="0" y="0"/>
+          <a:chExt cx="0" cy="0"/>
+        </a:xfrm>
+      </p:grpSpPr>
       <p:sp>
         <p:nvSpPr>
           <p:cNvPr id="2" name="TextBox 1"/>
@@ -12480,7 +15286,7 @@
           <a:noFill/>
         </p:spPr>
         <p:txBody>
-          <a:bodyPr wrap="square" anchor="t" lIns="0" rIns="0" tIns="0" bIns="0">
+          <a:bodyPr wrap="square" lIns="0" tIns="0" rIns="0" bIns="0" anchor="t">
             <a:spAutoFit/>
           </a:bodyPr>
           <a:lstStyle/>
@@ -12519,7 +15325,7 @@
           <a:noFill/>
         </p:spPr>
         <p:txBody>
-          <a:bodyPr wrap="square" anchor="t" lIns="0" rIns="0" tIns="0" bIns="0">
+          <a:bodyPr wrap="square" lIns="0" tIns="0" rIns="0" bIns="0" anchor="t">
             <a:spAutoFit/>
           </a:bodyPr>
           <a:lstStyle/>
@@ -12530,7 +15336,7 @@
               </a:lnSpc>
             </a:pPr>
             <a:r>
-              <a:rPr sz="3000" b="0">
+              <a:rPr sz="3000" b="0" dirty="0">
                 <a:solidFill>
                   <a:srgbClr val="1A1D21"/>
                 </a:solidFill>
@@ -12558,7 +15364,7 @@
           <a:noFill/>
         </p:spPr>
         <p:txBody>
-          <a:bodyPr wrap="square" anchor="t" lIns="0" rIns="0" tIns="0" bIns="0">
+          <a:bodyPr wrap="square" lIns="0" tIns="0" rIns="0" bIns="0" anchor="t">
             <a:spAutoFit/>
           </a:bodyPr>
           <a:lstStyle/>
@@ -12569,7 +15375,7 @@
               </a:lnSpc>
             </a:pPr>
             <a:r>
-              <a:rPr sz="8800" b="0">
+              <a:rPr sz="8800" b="0" dirty="0">
                 <a:solidFill>
                   <a:srgbClr val="A8322A"/>
                 </a:solidFill>
@@ -12597,7 +15403,7 @@
           <a:noFill/>
         </p:spPr>
         <p:txBody>
-          <a:bodyPr wrap="square" anchor="t" lIns="0" rIns="0" tIns="0" bIns="0">
+          <a:bodyPr wrap="square" lIns="0" tIns="0" rIns="0" bIns="0" anchor="t">
             <a:spAutoFit/>
           </a:bodyPr>
           <a:lstStyle/>
@@ -12608,7 +15414,7 @@
               </a:lnSpc>
             </a:pPr>
             <a:r>
-              <a:rPr sz="1300" b="0">
+              <a:rPr sz="1300" b="0" dirty="0">
                 <a:solidFill>
                   <a:srgbClr val="70757A"/>
                 </a:solidFill>
@@ -12661,6 +15467,7 @@
           <a:lstStyle/>
           <a:p>
             <a:pPr algn="ctr"/>
+            <a:endParaRPr/>
           </a:p>
         </p:txBody>
       </p:sp>
@@ -12681,7 +15488,7 @@
           <a:noFill/>
         </p:spPr>
         <p:txBody>
-          <a:bodyPr wrap="square" anchor="t" lIns="0" rIns="0" tIns="0" bIns="0">
+          <a:bodyPr wrap="square" lIns="0" tIns="0" rIns="0" bIns="0" anchor="t">
             <a:spAutoFit/>
           </a:bodyPr>
           <a:lstStyle/>
@@ -12720,7 +15527,7 @@
           <a:noFill/>
         </p:spPr>
         <p:txBody>
-          <a:bodyPr wrap="square" anchor="t" lIns="0" rIns="0" tIns="0" bIns="0">
+          <a:bodyPr wrap="square" lIns="0" tIns="0" rIns="0" bIns="0" anchor="t">
             <a:spAutoFit/>
           </a:bodyPr>
           <a:lstStyle/>
@@ -12731,7 +15538,7 @@
               </a:lnSpc>
             </a:pPr>
             <a:r>
-              <a:rPr sz="1500" b="1">
+              <a:rPr sz="1500" b="1" dirty="0">
                 <a:solidFill>
                   <a:srgbClr val="A8322A"/>
                 </a:solidFill>
@@ -12746,14 +15553,27 @@
                 <a:spcPct val="135000"/>
               </a:lnSpc>
             </a:pPr>
-            <a:r>
-              <a:rPr sz="800" b="0">
+            <a:endParaRPr sz="1500" b="1" dirty="0">
+              <a:solidFill>
+                <a:srgbClr val="A8322A"/>
+              </a:solidFill>
+              <a:latin typeface="Segoe UI"/>
+            </a:endParaRPr>
+          </a:p>
+          <a:p>
+            <a:pPr algn="l">
+              <a:lnSpc>
+                <a:spcPct val="135000"/>
+              </a:lnSpc>
+            </a:pPr>
+            <a:r>
+              <a:rPr sz="1600" b="0" dirty="0">
                 <a:solidFill>
                   <a:srgbClr val="1A1D21"/>
                 </a:solidFill>
                 <a:latin typeface="Segoe UI"/>
               </a:rPr>
-              <a:t/>
+              <a:t>The standard explanation for bad query plans is bad row estimates.</a:t>
             </a:r>
           </a:p>
           <a:p>
@@ -12762,14 +15582,27 @@
                 <a:spcPct val="135000"/>
               </a:lnSpc>
             </a:pPr>
-            <a:r>
-              <a:rPr sz="1600" b="0">
+            <a:endParaRPr sz="1600" b="0" dirty="0">
+              <a:solidFill>
+                <a:srgbClr val="1A1D21"/>
+              </a:solidFill>
+              <a:latin typeface="Segoe UI"/>
+            </a:endParaRPr>
+          </a:p>
+          <a:p>
+            <a:pPr algn="l">
+              <a:lnSpc>
+                <a:spcPct val="135000"/>
+              </a:lnSpc>
+            </a:pPr>
+            <a:r>
+              <a:rPr sz="1600" b="1" dirty="0">
                 <a:solidFill>
                   <a:srgbClr val="1A1D21"/>
                 </a:solidFill>
                 <a:latin typeface="Segoe UI"/>
               </a:rPr>
-              <a:t>The standard explanation for bad query plans is bad row estimates.</a:t>
+              <a:t>Here the estimates were fine. So better statistics cannot fix this, and most tuning advice is aimed at statistics.</a:t>
             </a:r>
           </a:p>
           <a:p>
@@ -12778,15 +15611,12 @@
                 <a:spcPct val="135000"/>
               </a:lnSpc>
             </a:pPr>
-            <a:r>
-              <a:rPr sz="800" b="0">
-                <a:solidFill>
-                  <a:srgbClr val="1A1D21"/>
-                </a:solidFill>
-                <a:latin typeface="Segoe UI"/>
-              </a:rPr>
-              <a:t/>
-            </a:r>
+            <a:endParaRPr sz="1600" b="1" dirty="0">
+              <a:solidFill>
+                <a:srgbClr val="1A1D21"/>
+              </a:solidFill>
+              <a:latin typeface="Segoe UI"/>
+            </a:endParaRPr>
           </a:p>
           <a:p>
             <a:pPr algn="l">
@@ -12795,39 +15625,7 @@
               </a:lnSpc>
             </a:pPr>
             <a:r>
-              <a:rPr sz="1600" b="1">
-                <a:solidFill>
-                  <a:srgbClr val="1A1D21"/>
-                </a:solidFill>
-                <a:latin typeface="Segoe UI"/>
-              </a:rPr>
-              <a:t>Here the estimates were fine. So better statistics cannot fix this, and most tuning advice is aimed at statistics.</a:t>
-            </a:r>
-          </a:p>
-          <a:p>
-            <a:pPr algn="l">
-              <a:lnSpc>
-                <a:spcPct val="135000"/>
-              </a:lnSpc>
-            </a:pPr>
-            <a:r>
-              <a:rPr sz="800" b="0">
-                <a:solidFill>
-                  <a:srgbClr val="1A1D21"/>
-                </a:solidFill>
-                <a:latin typeface="Segoe UI"/>
-              </a:rPr>
-              <a:t/>
-            </a:r>
-          </a:p>
-          <a:p>
-            <a:pPr algn="l">
-              <a:lnSpc>
-                <a:spcPct val="135000"/>
-              </a:lnSpc>
-            </a:pPr>
-            <a:r>
-              <a:rPr sz="1600" b="0">
+              <a:rPr sz="1600" b="0" dirty="0">
                 <a:solidFill>
                   <a:srgbClr val="1A1D21"/>
                 </a:solidFill>
@@ -12855,7 +15653,7 @@
           <a:noFill/>
         </p:spPr>
         <p:txBody>
-          <a:bodyPr wrap="square" anchor="t" lIns="0" rIns="0" tIns="0" bIns="0">
+          <a:bodyPr wrap="square" lIns="0" tIns="0" rIns="0" bIns="0" anchor="t">
             <a:spAutoFit/>
           </a:bodyPr>
           <a:lstStyle/>
@@ -12873,441 +15671,6 @@
                 <a:latin typeface="Segoe UI"/>
               </a:rPr>
               <a:t>8</a:t>
-            </a:r>
-          </a:p>
-        </p:txBody>
-      </p:sp>
-    </p:spTree>
-  </p:cSld>
-  <p:clrMapOvr>
-    <a:masterClrMapping/>
-  </p:clrMapOvr>
-</p:sld>
-</file>
-
-<file path=ppt/slides/slide9.xml><?xml version="1.0" encoding="utf-8"?>
-<p:sld xmlns:a="http://schemas.openxmlformats.org/drawingml/2006/main" xmlns:p="http://schemas.openxmlformats.org/presentationml/2006/main" xmlns:r="http://schemas.openxmlformats.org/officeDocument/2006/relationships">
-  <p:cSld>
-    <p:bg>
-      <p:bgPr>
-        <a:solidFill>
-          <a:srgbClr val="14171A"/>
-        </a:solidFill>
-        <a:effectLst/>
-      </p:bgPr>
-    </p:bg>
-    <p:spTree>
-      <p:nvGrpSpPr>
-        <p:cNvPr id="1" name=""/>
-        <p:cNvGrpSpPr/>
-        <p:nvPr/>
-      </p:nvGrpSpPr>
-      <p:grpSpPr/>
-      <p:sp>
-        <p:nvSpPr>
-          <p:cNvPr id="2" name="TextBox 1"/>
-          <p:cNvSpPr txBox="1"/>
-          <p:nvPr/>
-        </p:nvSpPr>
-        <p:spPr>
-          <a:xfrm>
-            <a:off x="822960" y="566928"/>
-            <a:ext cx="10546080" cy="274320"/>
-          </a:xfrm>
-          <a:prstGeom prst="rect">
-            <a:avLst/>
-          </a:prstGeom>
-          <a:noFill/>
-        </p:spPr>
-        <p:txBody>
-          <a:bodyPr wrap="square" anchor="t" lIns="0" rIns="0" tIns="0" bIns="0">
-            <a:spAutoFit/>
-          </a:bodyPr>
-          <a:lstStyle/>
-          <a:p>
-            <a:pPr algn="l">
-              <a:lnSpc>
-                <a:spcPct val="100000"/>
-              </a:lnSpc>
-            </a:pPr>
-            <a:r>
-              <a:rPr sz="1050" b="1">
-                <a:solidFill>
-                  <a:srgbClr val="92989E"/>
-                </a:solidFill>
-                <a:latin typeface="Segoe UI"/>
-              </a:rPr>
-              <a:t>THE BIGGEST EFFECT WE MEASURED</a:t>
-            </a:r>
-          </a:p>
-        </p:txBody>
-      </p:sp>
-      <p:sp>
-        <p:nvSpPr>
-          <p:cNvPr id="3" name="TextBox 2"/>
-          <p:cNvSpPr txBox="1"/>
-          <p:nvPr/>
-        </p:nvSpPr>
-        <p:spPr>
-          <a:xfrm>
-            <a:off x="822960" y="914400"/>
-            <a:ext cx="10546080" cy="1005840"/>
-          </a:xfrm>
-          <a:prstGeom prst="rect">
-            <a:avLst/>
-          </a:prstGeom>
-          <a:noFill/>
-        </p:spPr>
-        <p:txBody>
-          <a:bodyPr wrap="square" anchor="t" lIns="0" rIns="0" tIns="0" bIns="0">
-            <a:spAutoFit/>
-          </a:bodyPr>
-          <a:lstStyle/>
-          <a:p>
-            <a:pPr algn="l">
-              <a:lnSpc>
-                <a:spcPct val="112000"/>
-              </a:lnSpc>
-            </a:pPr>
-            <a:r>
-              <a:rPr sz="3000" b="0">
-                <a:solidFill>
-                  <a:srgbClr val="F2EFEA"/>
-                </a:solidFill>
-                <a:latin typeface="Georgia"/>
-              </a:rPr>
-              <a:t>Adding an index made the query slower</a:t>
-            </a:r>
-          </a:p>
-        </p:txBody>
-      </p:sp>
-      <p:sp>
-        <p:nvSpPr>
-          <p:cNvPr id="4" name="TextBox 3"/>
-          <p:cNvSpPr txBox="1"/>
-          <p:nvPr/>
-        </p:nvSpPr>
-        <p:spPr>
-          <a:xfrm>
-            <a:off x="822960" y="2194560"/>
-            <a:ext cx="5669280" cy="1280160"/>
-          </a:xfrm>
-          <a:prstGeom prst="rect">
-            <a:avLst/>
-          </a:prstGeom>
-          <a:noFill/>
-        </p:spPr>
-        <p:txBody>
-          <a:bodyPr wrap="square" anchor="t" lIns="0" rIns="0" tIns="0" bIns="0">
-            <a:spAutoFit/>
-          </a:bodyPr>
-          <a:lstStyle/>
-          <a:p>
-            <a:pPr algn="l">
-              <a:lnSpc>
-                <a:spcPct val="95000"/>
-              </a:lnSpc>
-            </a:pPr>
-            <a:r>
-              <a:rPr sz="9400" b="0">
-                <a:solidFill>
-                  <a:srgbClr val="E27660"/>
-                </a:solidFill>
-                <a:latin typeface="Georgia"/>
-              </a:rPr>
-              <a:t>194x</a:t>
-            </a:r>
-          </a:p>
-        </p:txBody>
-      </p:sp>
-      <p:sp>
-        <p:nvSpPr>
-          <p:cNvPr id="5" name="TextBox 4"/>
-          <p:cNvSpPr txBox="1"/>
-          <p:nvPr/>
-        </p:nvSpPr>
-        <p:spPr>
-          <a:xfrm>
-            <a:off x="822960" y="3531108"/>
-            <a:ext cx="5669280" cy="822960"/>
-          </a:xfrm>
-          <a:prstGeom prst="rect">
-            <a:avLst/>
-          </a:prstGeom>
-          <a:noFill/>
-        </p:spPr>
-        <p:txBody>
-          <a:bodyPr wrap="square" anchor="t" lIns="0" rIns="0" tIns="0" bIns="0">
-            <a:spAutoFit/>
-          </a:bodyPr>
-          <a:lstStyle/>
-          <a:p>
-            <a:pPr algn="l">
-              <a:lnSpc>
-                <a:spcPct val="125000"/>
-              </a:lnSpc>
-            </a:pPr>
-            <a:r>
-              <a:rPr sz="1300" b="0">
-                <a:solidFill>
-                  <a:srgbClr val="92989E"/>
-                </a:solidFill>
-                <a:latin typeface="Segoe UI"/>
-              </a:rPr>
-              <a:t>slower, and the only thing that changed was that
-a BRIN index existed next to the B-tree</a:t>
-            </a:r>
-          </a:p>
-        </p:txBody>
-      </p:sp>
-      <p:sp>
-        <p:nvSpPr>
-          <p:cNvPr id="6" name="TextBox 5"/>
-          <p:cNvSpPr txBox="1"/>
-          <p:nvPr/>
-        </p:nvSpPr>
-        <p:spPr>
-          <a:xfrm>
-            <a:off x="822960" y="4709160"/>
-            <a:ext cx="5669280" cy="548640"/>
-          </a:xfrm>
-          <a:prstGeom prst="rect">
-            <a:avLst/>
-          </a:prstGeom>
-          <a:noFill/>
-        </p:spPr>
-        <p:txBody>
-          <a:bodyPr wrap="square" anchor="t" lIns="0" rIns="0" tIns="0" bIns="0">
-            <a:spAutoFit/>
-          </a:bodyPr>
-          <a:lstStyle/>
-          <a:p>
-            <a:pPr algn="l">
-              <a:lnSpc>
-                <a:spcPct val="120000"/>
-              </a:lnSpc>
-            </a:pPr>
-            <a:r>
-              <a:rPr sz="2200" b="0">
-                <a:solidFill>
-                  <a:srgbClr val="F2EFEA"/>
-                </a:solidFill>
-                <a:latin typeface="Georgia"/>
-              </a:rPr>
-              <a:t>0.34 ms  becomes  65.95 ms</a:t>
-            </a:r>
-          </a:p>
-        </p:txBody>
-      </p:sp>
-      <p:sp>
-        <p:nvSpPr>
-          <p:cNvPr id="7" name="TextBox 6"/>
-          <p:cNvSpPr txBox="1"/>
-          <p:nvPr/>
-        </p:nvSpPr>
-        <p:spPr>
-          <a:xfrm>
-            <a:off x="6858000" y="2240280"/>
-            <a:ext cx="4480560" cy="3657600"/>
-          </a:xfrm>
-          <a:prstGeom prst="rect">
-            <a:avLst/>
-          </a:prstGeom>
-          <a:noFill/>
-        </p:spPr>
-        <p:txBody>
-          <a:bodyPr wrap="square" anchor="t" lIns="0" rIns="0" tIns="0" bIns="0">
-            <a:spAutoFit/>
-          </a:bodyPr>
-          <a:lstStyle/>
-          <a:p>
-            <a:pPr algn="l">
-              <a:lnSpc>
-                <a:spcPct val="132000"/>
-              </a:lnSpc>
-            </a:pPr>
-            <a:r>
-              <a:rPr sz="1700" b="1">
-                <a:solidFill>
-                  <a:srgbClr val="F2EFEA"/>
-                </a:solidFill>
-                <a:latin typeface="Segoe UI"/>
-              </a:rPr>
-              <a:t>Bad choices: 2.3%  becomes  73.3%</a:t>
-            </a:r>
-          </a:p>
-          <a:p>
-            <a:pPr algn="l">
-              <a:lnSpc>
-                <a:spcPct val="132000"/>
-              </a:lnSpc>
-            </a:pPr>
-            <a:r>
-              <a:rPr sz="1200" b="0">
-                <a:solidFill>
-                  <a:srgbClr val="F2EFEA"/>
-                </a:solidFill>
-                <a:latin typeface="Segoe UI"/>
-              </a:rPr>
-              <a:t/>
-            </a:r>
-          </a:p>
-          <a:p>
-            <a:pPr algn="l">
-              <a:lnSpc>
-                <a:spcPct val="132000"/>
-              </a:lnSpc>
-            </a:pPr>
-            <a:r>
-              <a:rPr sz="1400" b="1">
-                <a:solidFill>
-                  <a:srgbClr val="E27660"/>
-                </a:solidFill>
-                <a:latin typeface="Segoe UI"/>
-              </a:rPr>
-              <a:t>The cause, in one sentence</a:t>
-            </a:r>
-          </a:p>
-          <a:p>
-            <a:pPr algn="l">
-              <a:lnSpc>
-                <a:spcPct val="132000"/>
-              </a:lnSpc>
-            </a:pPr>
-            <a:r>
-              <a:rPr sz="600" b="0">
-                <a:solidFill>
-                  <a:srgbClr val="F2EFEA"/>
-                </a:solidFill>
-                <a:latin typeface="Segoe UI"/>
-              </a:rPr>
-              <a:t/>
-            </a:r>
-          </a:p>
-          <a:p>
-            <a:pPr algn="l">
-              <a:lnSpc>
-                <a:spcPct val="132000"/>
-              </a:lnSpc>
-            </a:pPr>
-            <a:r>
-              <a:rPr sz="1550" b="0">
-                <a:solidFill>
-                  <a:srgbClr val="F2EFEA"/>
-                </a:solidFill>
-                <a:latin typeface="Segoe UI"/>
-              </a:rPr>
-              <a:t>When two indexes can answer the same query, PostgreSQL keeps whichever is cheaper to read, and ignores the work the query then does on the table.</a:t>
-            </a:r>
-          </a:p>
-          <a:p>
-            <a:pPr algn="l">
-              <a:lnSpc>
-                <a:spcPct val="132000"/>
-              </a:lnSpc>
-            </a:pPr>
-            <a:r>
-              <a:rPr sz="800" b="0">
-                <a:solidFill>
-                  <a:srgbClr val="F2EFEA"/>
-                </a:solidFill>
-                <a:latin typeface="Segoe UI"/>
-              </a:rPr>
-              <a:t/>
-            </a:r>
-          </a:p>
-          <a:p>
-            <a:pPr algn="l">
-              <a:lnSpc>
-                <a:spcPct val="132000"/>
-              </a:lnSpc>
-            </a:pPr>
-            <a:r>
-              <a:rPr sz="1550" b="1">
-                <a:solidFill>
-                  <a:srgbClr val="F2EFEA"/>
-                </a:solidFill>
-                <a:latin typeface="Segoe UI"/>
-              </a:rPr>
-              <a:t>A BRIN index is tiny, so it always wins that comparison. The index it discards is the fast one.</a:t>
-            </a:r>
-          </a:p>
-        </p:txBody>
-      </p:sp>
-      <p:sp>
-        <p:nvSpPr>
-          <p:cNvPr id="8" name="TextBox 7"/>
-          <p:cNvSpPr txBox="1"/>
-          <p:nvPr/>
-        </p:nvSpPr>
-        <p:spPr>
-          <a:xfrm>
-            <a:off x="822960" y="6108192"/>
-            <a:ext cx="10546080" cy="365760"/>
-          </a:xfrm>
-          <a:prstGeom prst="rect">
-            <a:avLst/>
-          </a:prstGeom>
-          <a:noFill/>
-        </p:spPr>
-        <p:txBody>
-          <a:bodyPr wrap="square" anchor="t" lIns="0" rIns="0" tIns="0" bIns="0">
-            <a:spAutoFit/>
-          </a:bodyPr>
-          <a:lstStyle/>
-          <a:p>
-            <a:pPr algn="l">
-              <a:lnSpc>
-                <a:spcPct val="120000"/>
-              </a:lnSpc>
-            </a:pPr>
-            <a:r>
-              <a:rPr sz="1050" b="0">
-                <a:solidFill>
-                  <a:srgbClr val="92989E"/>
-                </a:solidFill>
-                <a:latin typeface="Segoe UI"/>
-              </a:rPr>
-              <a:t>Only while the table still fits in the buffer pool, which is exactly the size at which BRIN is recommended as free.</a:t>
-            </a:r>
-          </a:p>
-        </p:txBody>
-      </p:sp>
-      <p:sp>
-        <p:nvSpPr>
-          <p:cNvPr id="9" name="TextBox 8"/>
-          <p:cNvSpPr txBox="1"/>
-          <p:nvPr/>
-        </p:nvSpPr>
-        <p:spPr>
-          <a:xfrm>
-            <a:off x="10728960" y="6327648"/>
-            <a:ext cx="640080" cy="274320"/>
-          </a:xfrm>
-          <a:prstGeom prst="rect">
-            <a:avLst/>
-          </a:prstGeom>
-          <a:noFill/>
-        </p:spPr>
-        <p:txBody>
-          <a:bodyPr wrap="square" anchor="t" lIns="0" rIns="0" tIns="0" bIns="0">
-            <a:spAutoFit/>
-          </a:bodyPr>
-          <a:lstStyle/>
-          <a:p>
-            <a:pPr algn="r">
-              <a:lnSpc>
-                <a:spcPct val="100000"/>
-              </a:lnSpc>
-            </a:pPr>
-            <a:r>
-              <a:rPr sz="1000" b="0">
-                <a:solidFill>
-                  <a:srgbClr val="4A5056"/>
-                </a:solidFill>
-                <a:latin typeface="Segoe UI"/>
-              </a:rPr>
-              <a:t>9</a:t>
             </a:r>
           </a:p>
         </p:txBody>
